--- a/psychologicalReview/figures/actionParadigmFiguresTargetFindings1&2.pptx
+++ b/psychologicalReview/figures/actionParadigmFiguresTargetFindings1&2.pptx
@@ -2,7 +2,7 @@
 <file path=ppt/presentation.xml><?xml version="1.0" encoding="utf-8"?>
 <p:presentation xmlns:a="http://schemas.openxmlformats.org/drawingml/2006/main" xmlns:r="http://schemas.openxmlformats.org/officeDocument/2006/relationships" xmlns:p="http://schemas.openxmlformats.org/presentationml/2006/main" saveSubsetFonts="1">
   <p:sldMasterIdLst>
-    <p:sldMasterId id="2147483756" r:id="rId4"/>
+    <p:sldMasterId id="2147483780" r:id="rId4"/>
   </p:sldMasterIdLst>
   <p:notesMasterIdLst>
     <p:notesMasterId r:id="rId8"/>
@@ -12,7 +12,7 @@
     <p:sldId id="257" r:id="rId6"/>
     <p:sldId id="260" r:id="rId7"/>
   </p:sldIdLst>
-  <p:sldSz cx="39600188" cy="21599525"/>
+  <p:sldSz cx="39600188" cy="14173200"/>
   <p:notesSz cx="6858000" cy="9144000"/>
   <p:defaultTextStyle>
     <a:defPPr>
@@ -217,8 +217,8 @@
         </p:nvSpPr>
         <p:spPr>
           <a:xfrm>
-            <a:off x="600075" y="1143000"/>
-            <a:ext cx="5657850" cy="3086100"/>
+            <a:off x="-881063" y="1143000"/>
+            <a:ext cx="8620126" cy="3086100"/>
           </a:xfrm>
           <a:prstGeom prst="rect">
             <a:avLst/>
@@ -495,8 +495,8 @@
         </p:nvSpPr>
         <p:spPr>
           <a:xfrm>
-            <a:off x="600075" y="1143000"/>
-            <a:ext cx="5657850" cy="3086100"/>
+            <a:off x="-881063" y="1143000"/>
+            <a:ext cx="8620126" cy="3086100"/>
           </a:xfrm>
         </p:spPr>
       </p:sp>
@@ -596,8 +596,8 @@
         </p:nvSpPr>
         <p:spPr>
           <a:xfrm>
-            <a:off x="600075" y="1143000"/>
-            <a:ext cx="5657850" cy="3086100"/>
+            <a:off x="-881063" y="1143000"/>
+            <a:ext cx="8620126" cy="3086100"/>
           </a:xfrm>
         </p:spPr>
       </p:sp>
@@ -697,15 +697,15 @@
         </p:nvSpPr>
         <p:spPr>
           <a:xfrm>
-            <a:off x="4950024" y="3534924"/>
-            <a:ext cx="29700141" cy="7519835"/>
+            <a:off x="4950024" y="2319550"/>
+            <a:ext cx="29700141" cy="4934373"/>
           </a:xfrm>
         </p:spPr>
         <p:txBody>
           <a:bodyPr anchor="b"/>
           <a:lstStyle>
             <a:lvl1pPr algn="ctr">
-              <a:defRPr sz="18897"/>
+              <a:defRPr sz="12400"/>
             </a:lvl1pPr>
           </a:lstStyle>
           <a:p>
@@ -729,8 +729,8 @@
         </p:nvSpPr>
         <p:spPr>
           <a:xfrm>
-            <a:off x="4950024" y="11344752"/>
-            <a:ext cx="29700141" cy="5214884"/>
+            <a:off x="4950024" y="7444212"/>
+            <a:ext cx="29700141" cy="3421908"/>
           </a:xfrm>
         </p:spPr>
         <p:txBody>
@@ -738,39 +738,39 @@
           <a:lstStyle>
             <a:lvl1pPr marL="0" indent="0" algn="ctr">
               <a:buNone/>
-              <a:defRPr sz="7559"/>
+              <a:defRPr sz="4960"/>
             </a:lvl1pPr>
-            <a:lvl2pPr marL="1439951" indent="0" algn="ctr">
+            <a:lvl2pPr marL="944895" indent="0" algn="ctr">
               <a:buNone/>
-              <a:defRPr sz="6299"/>
+              <a:defRPr sz="4133"/>
             </a:lvl2pPr>
-            <a:lvl3pPr marL="2879903" indent="0" algn="ctr">
+            <a:lvl3pPr marL="1889790" indent="0" algn="ctr">
               <a:buNone/>
-              <a:defRPr sz="5669"/>
+              <a:defRPr sz="3720"/>
             </a:lvl3pPr>
-            <a:lvl4pPr marL="4319854" indent="0" algn="ctr">
+            <a:lvl4pPr marL="2834686" indent="0" algn="ctr">
               <a:buNone/>
-              <a:defRPr sz="5039"/>
+              <a:defRPr sz="3307"/>
             </a:lvl4pPr>
-            <a:lvl5pPr marL="5759806" indent="0" algn="ctr">
+            <a:lvl5pPr marL="3779581" indent="0" algn="ctr">
               <a:buNone/>
-              <a:defRPr sz="5039"/>
+              <a:defRPr sz="3307"/>
             </a:lvl5pPr>
-            <a:lvl6pPr marL="7199757" indent="0" algn="ctr">
+            <a:lvl6pPr marL="4724476" indent="0" algn="ctr">
               <a:buNone/>
-              <a:defRPr sz="5039"/>
+              <a:defRPr sz="3307"/>
             </a:lvl6pPr>
-            <a:lvl7pPr marL="8639708" indent="0" algn="ctr">
+            <a:lvl7pPr marL="5669371" indent="0" algn="ctr">
               <a:buNone/>
-              <a:defRPr sz="5039"/>
+              <a:defRPr sz="3307"/>
             </a:lvl7pPr>
-            <a:lvl8pPr marL="10079660" indent="0" algn="ctr">
+            <a:lvl8pPr marL="6614267" indent="0" algn="ctr">
               <a:buNone/>
-              <a:defRPr sz="5039"/>
+              <a:defRPr sz="3307"/>
             </a:lvl8pPr>
-            <a:lvl9pPr marL="11519611" indent="0" algn="ctr">
+            <a:lvl9pPr marL="7559162" indent="0" algn="ctr">
               <a:buNone/>
-              <a:defRPr sz="5039"/>
+              <a:defRPr sz="3307"/>
             </a:lvl9pPr>
           </a:lstStyle>
           <a:p>
@@ -850,7 +850,7 @@
     </p:spTree>
     <p:extLst>
       <p:ext uri="{BB962C8B-B14F-4D97-AF65-F5344CB8AC3E}">
-        <p14:creationId xmlns:p14="http://schemas.microsoft.com/office/powerpoint/2010/main" val="3182315478"/>
+        <p14:creationId xmlns:p14="http://schemas.microsoft.com/office/powerpoint/2010/main" val="4016913649"/>
       </p:ext>
     </p:extLst>
   </p:cSld>
@@ -1020,7 +1020,7 @@
     </p:spTree>
     <p:extLst>
       <p:ext uri="{BB962C8B-B14F-4D97-AF65-F5344CB8AC3E}">
-        <p14:creationId xmlns:p14="http://schemas.microsoft.com/office/powerpoint/2010/main" val="3590121948"/>
+        <p14:creationId xmlns:p14="http://schemas.microsoft.com/office/powerpoint/2010/main" val="2233838902"/>
       </p:ext>
     </p:extLst>
   </p:cSld>
@@ -1059,8 +1059,8 @@
         </p:nvSpPr>
         <p:spPr>
           <a:xfrm>
-            <a:off x="28338884" y="1149975"/>
-            <a:ext cx="8538791" cy="18304599"/>
+            <a:off x="28338884" y="754592"/>
+            <a:ext cx="8538791" cy="12011132"/>
           </a:xfrm>
         </p:spPr>
         <p:txBody>
@@ -1087,8 +1087,8 @@
         </p:nvSpPr>
         <p:spPr>
           <a:xfrm>
-            <a:off x="2722513" y="1149975"/>
-            <a:ext cx="25121369" cy="18304599"/>
+            <a:off x="2722513" y="754592"/>
+            <a:ext cx="25121369" cy="12011132"/>
           </a:xfrm>
         </p:spPr>
         <p:txBody>
@@ -1200,7 +1200,7 @@
     </p:spTree>
     <p:extLst>
       <p:ext uri="{BB962C8B-B14F-4D97-AF65-F5344CB8AC3E}">
-        <p14:creationId xmlns:p14="http://schemas.microsoft.com/office/powerpoint/2010/main" val="4069974605"/>
+        <p14:creationId xmlns:p14="http://schemas.microsoft.com/office/powerpoint/2010/main" val="2321190548"/>
       </p:ext>
     </p:extLst>
   </p:cSld>
@@ -1370,7 +1370,7 @@
     </p:spTree>
     <p:extLst>
       <p:ext uri="{BB962C8B-B14F-4D97-AF65-F5344CB8AC3E}">
-        <p14:creationId xmlns:p14="http://schemas.microsoft.com/office/powerpoint/2010/main" val="859210949"/>
+        <p14:creationId xmlns:p14="http://schemas.microsoft.com/office/powerpoint/2010/main" val="1392521059"/>
       </p:ext>
     </p:extLst>
   </p:cSld>
@@ -1409,15 +1409,15 @@
         </p:nvSpPr>
         <p:spPr>
           <a:xfrm>
-            <a:off x="2701888" y="5384885"/>
-            <a:ext cx="34155162" cy="8984801"/>
+            <a:off x="2701888" y="3533460"/>
+            <a:ext cx="34155162" cy="5895656"/>
           </a:xfrm>
         </p:spPr>
         <p:txBody>
           <a:bodyPr anchor="b"/>
           <a:lstStyle>
             <a:lvl1pPr>
-              <a:defRPr sz="18897"/>
+              <a:defRPr sz="12400"/>
             </a:lvl1pPr>
           </a:lstStyle>
           <a:p>
@@ -1441,8 +1441,8 @@
         </p:nvSpPr>
         <p:spPr>
           <a:xfrm>
-            <a:off x="2701888" y="14454685"/>
-            <a:ext cx="34155162" cy="4724895"/>
+            <a:off x="2701888" y="9484891"/>
+            <a:ext cx="34155162" cy="3100386"/>
           </a:xfrm>
         </p:spPr>
         <p:txBody>
@@ -1450,7 +1450,7 @@
           <a:lstStyle>
             <a:lvl1pPr marL="0" indent="0">
               <a:buNone/>
-              <a:defRPr sz="7559">
+              <a:defRPr sz="4960">
                 <a:solidFill>
                   <a:schemeClr val="tx1">
                     <a:tint val="82000"/>
@@ -1458,9 +1458,9 @@
                 </a:solidFill>
               </a:defRPr>
             </a:lvl1pPr>
-            <a:lvl2pPr marL="1439951" indent="0">
+            <a:lvl2pPr marL="944895" indent="0">
               <a:buNone/>
-              <a:defRPr sz="6299">
+              <a:defRPr sz="4133">
                 <a:solidFill>
                   <a:schemeClr val="tx1">
                     <a:tint val="82000"/>
@@ -1468,9 +1468,9 @@
                 </a:solidFill>
               </a:defRPr>
             </a:lvl2pPr>
-            <a:lvl3pPr marL="2879903" indent="0">
+            <a:lvl3pPr marL="1889790" indent="0">
               <a:buNone/>
-              <a:defRPr sz="5669">
+              <a:defRPr sz="3720">
                 <a:solidFill>
                   <a:schemeClr val="tx1">
                     <a:tint val="82000"/>
@@ -1478,9 +1478,9 @@
                 </a:solidFill>
               </a:defRPr>
             </a:lvl3pPr>
-            <a:lvl4pPr marL="4319854" indent="0">
+            <a:lvl4pPr marL="2834686" indent="0">
               <a:buNone/>
-              <a:defRPr sz="5039">
+              <a:defRPr sz="3307">
                 <a:solidFill>
                   <a:schemeClr val="tx1">
                     <a:tint val="82000"/>
@@ -1488,9 +1488,9 @@
                 </a:solidFill>
               </a:defRPr>
             </a:lvl4pPr>
-            <a:lvl5pPr marL="5759806" indent="0">
+            <a:lvl5pPr marL="3779581" indent="0">
               <a:buNone/>
-              <a:defRPr sz="5039">
+              <a:defRPr sz="3307">
                 <a:solidFill>
                   <a:schemeClr val="tx1">
                     <a:tint val="82000"/>
@@ -1498,9 +1498,9 @@
                 </a:solidFill>
               </a:defRPr>
             </a:lvl5pPr>
-            <a:lvl6pPr marL="7199757" indent="0">
+            <a:lvl6pPr marL="4724476" indent="0">
               <a:buNone/>
-              <a:defRPr sz="5039">
+              <a:defRPr sz="3307">
                 <a:solidFill>
                   <a:schemeClr val="tx1">
                     <a:tint val="82000"/>
@@ -1508,9 +1508,9 @@
                 </a:solidFill>
               </a:defRPr>
             </a:lvl6pPr>
-            <a:lvl7pPr marL="8639708" indent="0">
+            <a:lvl7pPr marL="5669371" indent="0">
               <a:buNone/>
-              <a:defRPr sz="5039">
+              <a:defRPr sz="3307">
                 <a:solidFill>
                   <a:schemeClr val="tx1">
                     <a:tint val="82000"/>
@@ -1518,9 +1518,9 @@
                 </a:solidFill>
               </a:defRPr>
             </a:lvl7pPr>
-            <a:lvl8pPr marL="10079660" indent="0">
+            <a:lvl8pPr marL="6614267" indent="0">
               <a:buNone/>
-              <a:defRPr sz="5039">
+              <a:defRPr sz="3307">
                 <a:solidFill>
                   <a:schemeClr val="tx1">
                     <a:tint val="82000"/>
@@ -1528,9 +1528,9 @@
                 </a:solidFill>
               </a:defRPr>
             </a:lvl8pPr>
-            <a:lvl9pPr marL="11519611" indent="0">
+            <a:lvl9pPr marL="7559162" indent="0">
               <a:buNone/>
-              <a:defRPr sz="5039">
+              <a:defRPr sz="3307">
                 <a:solidFill>
                   <a:schemeClr val="tx1">
                     <a:tint val="82000"/>
@@ -1616,7 +1616,7 @@
     </p:spTree>
     <p:extLst>
       <p:ext uri="{BB962C8B-B14F-4D97-AF65-F5344CB8AC3E}">
-        <p14:creationId xmlns:p14="http://schemas.microsoft.com/office/powerpoint/2010/main" val="2655638981"/>
+        <p14:creationId xmlns:p14="http://schemas.microsoft.com/office/powerpoint/2010/main" val="730822170"/>
       </p:ext>
     </p:extLst>
   </p:cSld>
@@ -1678,8 +1678,8 @@
         </p:nvSpPr>
         <p:spPr>
           <a:xfrm>
-            <a:off x="2722513" y="5749874"/>
-            <a:ext cx="16830080" cy="13704700"/>
+            <a:off x="2722513" y="3772958"/>
+            <a:ext cx="16830080" cy="8992765"/>
           </a:xfrm>
         </p:spPr>
         <p:txBody>
@@ -1735,8 +1735,8 @@
         </p:nvSpPr>
         <p:spPr>
           <a:xfrm>
-            <a:off x="20047595" y="5749874"/>
-            <a:ext cx="16830080" cy="13704700"/>
+            <a:off x="20047595" y="3772958"/>
+            <a:ext cx="16830080" cy="8992765"/>
           </a:xfrm>
         </p:spPr>
         <p:txBody>
@@ -1848,7 +1848,7 @@
     </p:spTree>
     <p:extLst>
       <p:ext uri="{BB962C8B-B14F-4D97-AF65-F5344CB8AC3E}">
-        <p14:creationId xmlns:p14="http://schemas.microsoft.com/office/powerpoint/2010/main" val="3482478233"/>
+        <p14:creationId xmlns:p14="http://schemas.microsoft.com/office/powerpoint/2010/main" val="1950139919"/>
       </p:ext>
     </p:extLst>
   </p:cSld>
@@ -1887,8 +1887,8 @@
         </p:nvSpPr>
         <p:spPr>
           <a:xfrm>
-            <a:off x="2727671" y="1149976"/>
-            <a:ext cx="34155162" cy="4174910"/>
+            <a:off x="2727671" y="754593"/>
+            <a:ext cx="34155162" cy="2739497"/>
           </a:xfrm>
         </p:spPr>
         <p:txBody>
@@ -1915,8 +1915,8 @@
         </p:nvSpPr>
         <p:spPr>
           <a:xfrm>
-            <a:off x="2727673" y="5294885"/>
-            <a:ext cx="16752734" cy="2594941"/>
+            <a:off x="2727673" y="3474404"/>
+            <a:ext cx="16752734" cy="1702751"/>
           </a:xfrm>
         </p:spPr>
         <p:txBody>
@@ -1924,39 +1924,39 @@
           <a:lstStyle>
             <a:lvl1pPr marL="0" indent="0">
               <a:buNone/>
-              <a:defRPr sz="7559" b="1"/>
+              <a:defRPr sz="4960" b="1"/>
             </a:lvl1pPr>
-            <a:lvl2pPr marL="1439951" indent="0">
+            <a:lvl2pPr marL="944895" indent="0">
               <a:buNone/>
-              <a:defRPr sz="6299" b="1"/>
+              <a:defRPr sz="4133" b="1"/>
             </a:lvl2pPr>
-            <a:lvl3pPr marL="2879903" indent="0">
+            <a:lvl3pPr marL="1889790" indent="0">
               <a:buNone/>
-              <a:defRPr sz="5669" b="1"/>
+              <a:defRPr sz="3720" b="1"/>
             </a:lvl3pPr>
-            <a:lvl4pPr marL="4319854" indent="0">
+            <a:lvl4pPr marL="2834686" indent="0">
               <a:buNone/>
-              <a:defRPr sz="5039" b="1"/>
+              <a:defRPr sz="3307" b="1"/>
             </a:lvl4pPr>
-            <a:lvl5pPr marL="5759806" indent="0">
+            <a:lvl5pPr marL="3779581" indent="0">
               <a:buNone/>
-              <a:defRPr sz="5039" b="1"/>
+              <a:defRPr sz="3307" b="1"/>
             </a:lvl5pPr>
-            <a:lvl6pPr marL="7199757" indent="0">
+            <a:lvl6pPr marL="4724476" indent="0">
               <a:buNone/>
-              <a:defRPr sz="5039" b="1"/>
+              <a:defRPr sz="3307" b="1"/>
             </a:lvl6pPr>
-            <a:lvl7pPr marL="8639708" indent="0">
+            <a:lvl7pPr marL="5669371" indent="0">
               <a:buNone/>
-              <a:defRPr sz="5039" b="1"/>
+              <a:defRPr sz="3307" b="1"/>
             </a:lvl7pPr>
-            <a:lvl8pPr marL="10079660" indent="0">
+            <a:lvl8pPr marL="6614267" indent="0">
               <a:buNone/>
-              <a:defRPr sz="5039" b="1"/>
+              <a:defRPr sz="3307" b="1"/>
             </a:lvl8pPr>
-            <a:lvl9pPr marL="11519611" indent="0">
+            <a:lvl9pPr marL="7559162" indent="0">
               <a:buNone/>
-              <a:defRPr sz="5039" b="1"/>
+              <a:defRPr sz="3307" b="1"/>
             </a:lvl9pPr>
           </a:lstStyle>
           <a:p>
@@ -1980,8 +1980,8 @@
         </p:nvSpPr>
         <p:spPr>
           <a:xfrm>
-            <a:off x="2727673" y="7889827"/>
-            <a:ext cx="16752734" cy="11604746"/>
+            <a:off x="2727673" y="5177155"/>
+            <a:ext cx="16752734" cy="7614815"/>
           </a:xfrm>
         </p:spPr>
         <p:txBody>
@@ -2037,8 +2037,8 @@
         </p:nvSpPr>
         <p:spPr>
           <a:xfrm>
-            <a:off x="20047595" y="5294885"/>
-            <a:ext cx="16835238" cy="2594941"/>
+            <a:off x="20047595" y="3474404"/>
+            <a:ext cx="16835238" cy="1702751"/>
           </a:xfrm>
         </p:spPr>
         <p:txBody>
@@ -2046,39 +2046,39 @@
           <a:lstStyle>
             <a:lvl1pPr marL="0" indent="0">
               <a:buNone/>
-              <a:defRPr sz="7559" b="1"/>
+              <a:defRPr sz="4960" b="1"/>
             </a:lvl1pPr>
-            <a:lvl2pPr marL="1439951" indent="0">
+            <a:lvl2pPr marL="944895" indent="0">
               <a:buNone/>
-              <a:defRPr sz="6299" b="1"/>
+              <a:defRPr sz="4133" b="1"/>
             </a:lvl2pPr>
-            <a:lvl3pPr marL="2879903" indent="0">
+            <a:lvl3pPr marL="1889790" indent="0">
               <a:buNone/>
-              <a:defRPr sz="5669" b="1"/>
+              <a:defRPr sz="3720" b="1"/>
             </a:lvl3pPr>
-            <a:lvl4pPr marL="4319854" indent="0">
+            <a:lvl4pPr marL="2834686" indent="0">
               <a:buNone/>
-              <a:defRPr sz="5039" b="1"/>
+              <a:defRPr sz="3307" b="1"/>
             </a:lvl4pPr>
-            <a:lvl5pPr marL="5759806" indent="0">
+            <a:lvl5pPr marL="3779581" indent="0">
               <a:buNone/>
-              <a:defRPr sz="5039" b="1"/>
+              <a:defRPr sz="3307" b="1"/>
             </a:lvl5pPr>
-            <a:lvl6pPr marL="7199757" indent="0">
+            <a:lvl6pPr marL="4724476" indent="0">
               <a:buNone/>
-              <a:defRPr sz="5039" b="1"/>
+              <a:defRPr sz="3307" b="1"/>
             </a:lvl6pPr>
-            <a:lvl7pPr marL="8639708" indent="0">
+            <a:lvl7pPr marL="5669371" indent="0">
               <a:buNone/>
-              <a:defRPr sz="5039" b="1"/>
+              <a:defRPr sz="3307" b="1"/>
             </a:lvl7pPr>
-            <a:lvl8pPr marL="10079660" indent="0">
+            <a:lvl8pPr marL="6614267" indent="0">
               <a:buNone/>
-              <a:defRPr sz="5039" b="1"/>
+              <a:defRPr sz="3307" b="1"/>
             </a:lvl8pPr>
-            <a:lvl9pPr marL="11519611" indent="0">
+            <a:lvl9pPr marL="7559162" indent="0">
               <a:buNone/>
-              <a:defRPr sz="5039" b="1"/>
+              <a:defRPr sz="3307" b="1"/>
             </a:lvl9pPr>
           </a:lstStyle>
           <a:p>
@@ -2102,8 +2102,8 @@
         </p:nvSpPr>
         <p:spPr>
           <a:xfrm>
-            <a:off x="20047595" y="7889827"/>
-            <a:ext cx="16835238" cy="11604746"/>
+            <a:off x="20047595" y="5177155"/>
+            <a:ext cx="16835238" cy="7614815"/>
           </a:xfrm>
         </p:spPr>
         <p:txBody>
@@ -2215,7 +2215,7 @@
     </p:spTree>
     <p:extLst>
       <p:ext uri="{BB962C8B-B14F-4D97-AF65-F5344CB8AC3E}">
-        <p14:creationId xmlns:p14="http://schemas.microsoft.com/office/powerpoint/2010/main" val="2018103966"/>
+        <p14:creationId xmlns:p14="http://schemas.microsoft.com/office/powerpoint/2010/main" val="2926736050"/>
       </p:ext>
     </p:extLst>
   </p:cSld>
@@ -2333,7 +2333,7 @@
     </p:spTree>
     <p:extLst>
       <p:ext uri="{BB962C8B-B14F-4D97-AF65-F5344CB8AC3E}">
-        <p14:creationId xmlns:p14="http://schemas.microsoft.com/office/powerpoint/2010/main" val="4221655737"/>
+        <p14:creationId xmlns:p14="http://schemas.microsoft.com/office/powerpoint/2010/main" val="888232383"/>
       </p:ext>
     </p:extLst>
   </p:cSld>
@@ -2428,7 +2428,7 @@
     </p:spTree>
     <p:extLst>
       <p:ext uri="{BB962C8B-B14F-4D97-AF65-F5344CB8AC3E}">
-        <p14:creationId xmlns:p14="http://schemas.microsoft.com/office/powerpoint/2010/main" val="3638948064"/>
+        <p14:creationId xmlns:p14="http://schemas.microsoft.com/office/powerpoint/2010/main" val="2899651476"/>
       </p:ext>
     </p:extLst>
   </p:cSld>
@@ -2467,15 +2467,15 @@
         </p:nvSpPr>
         <p:spPr>
           <a:xfrm>
-            <a:off x="2727673" y="1439968"/>
-            <a:ext cx="12772090" cy="5039889"/>
+            <a:off x="2727673" y="944880"/>
+            <a:ext cx="12772090" cy="3307080"/>
           </a:xfrm>
         </p:spPr>
         <p:txBody>
           <a:bodyPr anchor="b"/>
           <a:lstStyle>
             <a:lvl1pPr>
-              <a:defRPr sz="10078"/>
+              <a:defRPr sz="6613"/>
             </a:lvl1pPr>
           </a:lstStyle>
           <a:p>
@@ -2499,39 +2499,39 @@
         </p:nvSpPr>
         <p:spPr>
           <a:xfrm>
-            <a:off x="16835238" y="3109933"/>
-            <a:ext cx="20047595" cy="15349662"/>
+            <a:off x="16835238" y="2040680"/>
+            <a:ext cx="20047595" cy="10072158"/>
           </a:xfrm>
         </p:spPr>
         <p:txBody>
           <a:bodyPr/>
           <a:lstStyle>
             <a:lvl1pPr>
-              <a:defRPr sz="10078"/>
+              <a:defRPr sz="6613"/>
             </a:lvl1pPr>
             <a:lvl2pPr>
-              <a:defRPr sz="8819"/>
+              <a:defRPr sz="5787"/>
             </a:lvl2pPr>
             <a:lvl3pPr>
-              <a:defRPr sz="7559"/>
+              <a:defRPr sz="4960"/>
             </a:lvl3pPr>
             <a:lvl4pPr>
-              <a:defRPr sz="6299"/>
+              <a:defRPr sz="4133"/>
             </a:lvl4pPr>
             <a:lvl5pPr>
-              <a:defRPr sz="6299"/>
+              <a:defRPr sz="4133"/>
             </a:lvl5pPr>
             <a:lvl6pPr>
-              <a:defRPr sz="6299"/>
+              <a:defRPr sz="4133"/>
             </a:lvl6pPr>
             <a:lvl7pPr>
-              <a:defRPr sz="6299"/>
+              <a:defRPr sz="4133"/>
             </a:lvl7pPr>
             <a:lvl8pPr>
-              <a:defRPr sz="6299"/>
+              <a:defRPr sz="4133"/>
             </a:lvl8pPr>
             <a:lvl9pPr>
-              <a:defRPr sz="6299"/>
+              <a:defRPr sz="4133"/>
             </a:lvl9pPr>
           </a:lstStyle>
           <a:p>
@@ -2584,8 +2584,8 @@
         </p:nvSpPr>
         <p:spPr>
           <a:xfrm>
-            <a:off x="2727673" y="6479857"/>
-            <a:ext cx="12772090" cy="12004738"/>
+            <a:off x="2727673" y="4251960"/>
+            <a:ext cx="12772090" cy="7877282"/>
           </a:xfrm>
         </p:spPr>
         <p:txBody>
@@ -2593,39 +2593,39 @@
           <a:lstStyle>
             <a:lvl1pPr marL="0" indent="0">
               <a:buNone/>
-              <a:defRPr sz="5039"/>
+              <a:defRPr sz="3307"/>
             </a:lvl1pPr>
-            <a:lvl2pPr marL="1439951" indent="0">
+            <a:lvl2pPr marL="944895" indent="0">
               <a:buNone/>
-              <a:defRPr sz="4409"/>
+              <a:defRPr sz="2893"/>
             </a:lvl2pPr>
-            <a:lvl3pPr marL="2879903" indent="0">
+            <a:lvl3pPr marL="1889790" indent="0">
               <a:buNone/>
-              <a:defRPr sz="3779"/>
+              <a:defRPr sz="2480"/>
             </a:lvl3pPr>
-            <a:lvl4pPr marL="4319854" indent="0">
+            <a:lvl4pPr marL="2834686" indent="0">
               <a:buNone/>
-              <a:defRPr sz="3150"/>
+              <a:defRPr sz="2067"/>
             </a:lvl4pPr>
-            <a:lvl5pPr marL="5759806" indent="0">
+            <a:lvl5pPr marL="3779581" indent="0">
               <a:buNone/>
-              <a:defRPr sz="3150"/>
+              <a:defRPr sz="2067"/>
             </a:lvl5pPr>
-            <a:lvl6pPr marL="7199757" indent="0">
+            <a:lvl6pPr marL="4724476" indent="0">
               <a:buNone/>
-              <a:defRPr sz="3150"/>
+              <a:defRPr sz="2067"/>
             </a:lvl6pPr>
-            <a:lvl7pPr marL="8639708" indent="0">
+            <a:lvl7pPr marL="5669371" indent="0">
               <a:buNone/>
-              <a:defRPr sz="3150"/>
+              <a:defRPr sz="2067"/>
             </a:lvl7pPr>
-            <a:lvl8pPr marL="10079660" indent="0">
+            <a:lvl8pPr marL="6614267" indent="0">
               <a:buNone/>
-              <a:defRPr sz="3150"/>
+              <a:defRPr sz="2067"/>
             </a:lvl8pPr>
-            <a:lvl9pPr marL="11519611" indent="0">
+            <a:lvl9pPr marL="7559162" indent="0">
               <a:buNone/>
-              <a:defRPr sz="3150"/>
+              <a:defRPr sz="2067"/>
             </a:lvl9pPr>
           </a:lstStyle>
           <a:p>
@@ -2705,7 +2705,7 @@
     </p:spTree>
     <p:extLst>
       <p:ext uri="{BB962C8B-B14F-4D97-AF65-F5344CB8AC3E}">
-        <p14:creationId xmlns:p14="http://schemas.microsoft.com/office/powerpoint/2010/main" val="664729503"/>
+        <p14:creationId xmlns:p14="http://schemas.microsoft.com/office/powerpoint/2010/main" val="1831464824"/>
       </p:ext>
     </p:extLst>
   </p:cSld>
@@ -2744,15 +2744,15 @@
         </p:nvSpPr>
         <p:spPr>
           <a:xfrm>
-            <a:off x="2727673" y="1439968"/>
-            <a:ext cx="12772090" cy="5039889"/>
+            <a:off x="2727673" y="944880"/>
+            <a:ext cx="12772090" cy="3307080"/>
           </a:xfrm>
         </p:spPr>
         <p:txBody>
           <a:bodyPr anchor="b"/>
           <a:lstStyle>
             <a:lvl1pPr>
-              <a:defRPr sz="10078"/>
+              <a:defRPr sz="6613"/>
             </a:lvl1pPr>
           </a:lstStyle>
           <a:p>
@@ -2776,8 +2776,8 @@
         </p:nvSpPr>
         <p:spPr>
           <a:xfrm>
-            <a:off x="16835238" y="3109933"/>
-            <a:ext cx="20047595" cy="15349662"/>
+            <a:off x="16835238" y="2040680"/>
+            <a:ext cx="20047595" cy="10072158"/>
           </a:xfrm>
         </p:spPr>
         <p:txBody>
@@ -2785,39 +2785,39 @@
           <a:lstStyle>
             <a:lvl1pPr marL="0" indent="0">
               <a:buNone/>
-              <a:defRPr sz="10078"/>
+              <a:defRPr sz="6613"/>
             </a:lvl1pPr>
-            <a:lvl2pPr marL="1439951" indent="0">
+            <a:lvl2pPr marL="944895" indent="0">
               <a:buNone/>
-              <a:defRPr sz="8819"/>
+              <a:defRPr sz="5787"/>
             </a:lvl2pPr>
-            <a:lvl3pPr marL="2879903" indent="0">
+            <a:lvl3pPr marL="1889790" indent="0">
               <a:buNone/>
-              <a:defRPr sz="7559"/>
+              <a:defRPr sz="4960"/>
             </a:lvl3pPr>
-            <a:lvl4pPr marL="4319854" indent="0">
+            <a:lvl4pPr marL="2834686" indent="0">
               <a:buNone/>
-              <a:defRPr sz="6299"/>
+              <a:defRPr sz="4133"/>
             </a:lvl4pPr>
-            <a:lvl5pPr marL="5759806" indent="0">
+            <a:lvl5pPr marL="3779581" indent="0">
               <a:buNone/>
-              <a:defRPr sz="6299"/>
+              <a:defRPr sz="4133"/>
             </a:lvl5pPr>
-            <a:lvl6pPr marL="7199757" indent="0">
+            <a:lvl6pPr marL="4724476" indent="0">
               <a:buNone/>
-              <a:defRPr sz="6299"/>
+              <a:defRPr sz="4133"/>
             </a:lvl6pPr>
-            <a:lvl7pPr marL="8639708" indent="0">
+            <a:lvl7pPr marL="5669371" indent="0">
               <a:buNone/>
-              <a:defRPr sz="6299"/>
+              <a:defRPr sz="4133"/>
             </a:lvl7pPr>
-            <a:lvl8pPr marL="10079660" indent="0">
+            <a:lvl8pPr marL="6614267" indent="0">
               <a:buNone/>
-              <a:defRPr sz="6299"/>
+              <a:defRPr sz="4133"/>
             </a:lvl8pPr>
-            <a:lvl9pPr marL="11519611" indent="0">
+            <a:lvl9pPr marL="7559162" indent="0">
               <a:buNone/>
-              <a:defRPr sz="6299"/>
+              <a:defRPr sz="4133"/>
             </a:lvl9pPr>
           </a:lstStyle>
           <a:p>
@@ -2841,8 +2841,8 @@
         </p:nvSpPr>
         <p:spPr>
           <a:xfrm>
-            <a:off x="2727673" y="6479857"/>
-            <a:ext cx="12772090" cy="12004738"/>
+            <a:off x="2727673" y="4251960"/>
+            <a:ext cx="12772090" cy="7877282"/>
           </a:xfrm>
         </p:spPr>
         <p:txBody>
@@ -2850,39 +2850,39 @@
           <a:lstStyle>
             <a:lvl1pPr marL="0" indent="0">
               <a:buNone/>
-              <a:defRPr sz="5039"/>
+              <a:defRPr sz="3307"/>
             </a:lvl1pPr>
-            <a:lvl2pPr marL="1439951" indent="0">
+            <a:lvl2pPr marL="944895" indent="0">
               <a:buNone/>
-              <a:defRPr sz="4409"/>
+              <a:defRPr sz="2893"/>
             </a:lvl2pPr>
-            <a:lvl3pPr marL="2879903" indent="0">
+            <a:lvl3pPr marL="1889790" indent="0">
               <a:buNone/>
-              <a:defRPr sz="3779"/>
+              <a:defRPr sz="2480"/>
             </a:lvl3pPr>
-            <a:lvl4pPr marL="4319854" indent="0">
+            <a:lvl4pPr marL="2834686" indent="0">
               <a:buNone/>
-              <a:defRPr sz="3150"/>
+              <a:defRPr sz="2067"/>
             </a:lvl4pPr>
-            <a:lvl5pPr marL="5759806" indent="0">
+            <a:lvl5pPr marL="3779581" indent="0">
               <a:buNone/>
-              <a:defRPr sz="3150"/>
+              <a:defRPr sz="2067"/>
             </a:lvl5pPr>
-            <a:lvl6pPr marL="7199757" indent="0">
+            <a:lvl6pPr marL="4724476" indent="0">
               <a:buNone/>
-              <a:defRPr sz="3150"/>
+              <a:defRPr sz="2067"/>
             </a:lvl6pPr>
-            <a:lvl7pPr marL="8639708" indent="0">
+            <a:lvl7pPr marL="5669371" indent="0">
               <a:buNone/>
-              <a:defRPr sz="3150"/>
+              <a:defRPr sz="2067"/>
             </a:lvl7pPr>
-            <a:lvl8pPr marL="10079660" indent="0">
+            <a:lvl8pPr marL="6614267" indent="0">
               <a:buNone/>
-              <a:defRPr sz="3150"/>
+              <a:defRPr sz="2067"/>
             </a:lvl8pPr>
-            <a:lvl9pPr marL="11519611" indent="0">
+            <a:lvl9pPr marL="7559162" indent="0">
               <a:buNone/>
-              <a:defRPr sz="3150"/>
+              <a:defRPr sz="2067"/>
             </a:lvl9pPr>
           </a:lstStyle>
           <a:p>
@@ -2962,7 +2962,7 @@
     </p:spTree>
     <p:extLst>
       <p:ext uri="{BB962C8B-B14F-4D97-AF65-F5344CB8AC3E}">
-        <p14:creationId xmlns:p14="http://schemas.microsoft.com/office/powerpoint/2010/main" val="3874737863"/>
+        <p14:creationId xmlns:p14="http://schemas.microsoft.com/office/powerpoint/2010/main" val="124452511"/>
       </p:ext>
     </p:extLst>
   </p:cSld>
@@ -3006,8 +3006,8 @@
         </p:nvSpPr>
         <p:spPr>
           <a:xfrm>
-            <a:off x="2722513" y="1149976"/>
-            <a:ext cx="34155162" cy="4174910"/>
+            <a:off x="2722513" y="754593"/>
+            <a:ext cx="34155162" cy="2739497"/>
           </a:xfrm>
           <a:prstGeom prst="rect">
             <a:avLst/>
@@ -3039,8 +3039,8 @@
         </p:nvSpPr>
         <p:spPr>
           <a:xfrm>
-            <a:off x="2722513" y="5749874"/>
-            <a:ext cx="34155162" cy="13704700"/>
+            <a:off x="2722513" y="3772958"/>
+            <a:ext cx="34155162" cy="8992765"/>
           </a:xfrm>
           <a:prstGeom prst="rect">
             <a:avLst/>
@@ -3101,8 +3101,8 @@
         </p:nvSpPr>
         <p:spPr>
           <a:xfrm>
-            <a:off x="2722513" y="20019561"/>
-            <a:ext cx="8910042" cy="1149975"/>
+            <a:off x="2722513" y="13136458"/>
+            <a:ext cx="8910042" cy="754592"/>
           </a:xfrm>
           <a:prstGeom prst="rect">
             <a:avLst/>
@@ -3112,7 +3112,7 @@
           <a:bodyPr vert="horz" lIns="91440" tIns="45720" rIns="91440" bIns="45720" rtlCol="0" anchor="ctr"/>
           <a:lstStyle>
             <a:lvl1pPr algn="l">
-              <a:defRPr sz="3779">
+              <a:defRPr sz="2480">
                 <a:solidFill>
                   <a:schemeClr val="tx1">
                     <a:tint val="82000"/>
@@ -3142,8 +3142,8 @@
         </p:nvSpPr>
         <p:spPr>
           <a:xfrm>
-            <a:off x="13117563" y="20019561"/>
-            <a:ext cx="13365063" cy="1149975"/>
+            <a:off x="13117563" y="13136458"/>
+            <a:ext cx="13365063" cy="754592"/>
           </a:xfrm>
           <a:prstGeom prst="rect">
             <a:avLst/>
@@ -3153,7 +3153,7 @@
           <a:bodyPr vert="horz" lIns="91440" tIns="45720" rIns="91440" bIns="45720" rtlCol="0" anchor="ctr"/>
           <a:lstStyle>
             <a:lvl1pPr algn="ctr">
-              <a:defRPr sz="3779">
+              <a:defRPr sz="2480">
                 <a:solidFill>
                   <a:schemeClr val="tx1">
                     <a:tint val="82000"/>
@@ -3179,8 +3179,8 @@
         </p:nvSpPr>
         <p:spPr>
           <a:xfrm>
-            <a:off x="27967633" y="20019561"/>
-            <a:ext cx="8910042" cy="1149975"/>
+            <a:off x="27967633" y="13136458"/>
+            <a:ext cx="8910042" cy="754592"/>
           </a:xfrm>
           <a:prstGeom prst="rect">
             <a:avLst/>
@@ -3190,7 +3190,7 @@
           <a:bodyPr vert="horz" lIns="91440" tIns="45720" rIns="91440" bIns="45720" rtlCol="0" anchor="ctr"/>
           <a:lstStyle>
             <a:lvl1pPr algn="r">
-              <a:defRPr sz="3779">
+              <a:defRPr sz="2480">
                 <a:solidFill>
                   <a:schemeClr val="tx1">
                     <a:tint val="82000"/>
@@ -3211,27 +3211,27 @@
     </p:spTree>
     <p:extLst>
       <p:ext uri="{BB962C8B-B14F-4D97-AF65-F5344CB8AC3E}">
-        <p14:creationId xmlns:p14="http://schemas.microsoft.com/office/powerpoint/2010/main" val="1658996888"/>
+        <p14:creationId xmlns:p14="http://schemas.microsoft.com/office/powerpoint/2010/main" val="3453822985"/>
       </p:ext>
     </p:extLst>
   </p:cSld>
   <p:clrMap bg1="lt1" tx1="dk1" bg2="lt2" tx2="dk2" accent1="accent1" accent2="accent2" accent3="accent3" accent4="accent4" accent5="accent5" accent6="accent6" hlink="hlink" folHlink="folHlink"/>
   <p:sldLayoutIdLst>
-    <p:sldLayoutId id="2147483757" r:id="rId1"/>
-    <p:sldLayoutId id="2147483758" r:id="rId2"/>
-    <p:sldLayoutId id="2147483759" r:id="rId3"/>
-    <p:sldLayoutId id="2147483760" r:id="rId4"/>
-    <p:sldLayoutId id="2147483761" r:id="rId5"/>
-    <p:sldLayoutId id="2147483762" r:id="rId6"/>
-    <p:sldLayoutId id="2147483763" r:id="rId7"/>
-    <p:sldLayoutId id="2147483764" r:id="rId8"/>
-    <p:sldLayoutId id="2147483765" r:id="rId9"/>
-    <p:sldLayoutId id="2147483766" r:id="rId10"/>
-    <p:sldLayoutId id="2147483767" r:id="rId11"/>
+    <p:sldLayoutId id="2147483781" r:id="rId1"/>
+    <p:sldLayoutId id="2147483782" r:id="rId2"/>
+    <p:sldLayoutId id="2147483783" r:id="rId3"/>
+    <p:sldLayoutId id="2147483784" r:id="rId4"/>
+    <p:sldLayoutId id="2147483785" r:id="rId5"/>
+    <p:sldLayoutId id="2147483786" r:id="rId6"/>
+    <p:sldLayoutId id="2147483787" r:id="rId7"/>
+    <p:sldLayoutId id="2147483788" r:id="rId8"/>
+    <p:sldLayoutId id="2147483789" r:id="rId9"/>
+    <p:sldLayoutId id="2147483790" r:id="rId10"/>
+    <p:sldLayoutId id="2147483791" r:id="rId11"/>
   </p:sldLayoutIdLst>
   <p:txStyles>
     <p:titleStyle>
-      <a:lvl1pPr algn="l" defTabSz="2879903" rtl="0" eaLnBrk="1" latinLnBrk="0" hangingPunct="1">
+      <a:lvl1pPr algn="l" defTabSz="1889790" rtl="0" eaLnBrk="1" latinLnBrk="0" hangingPunct="1">
         <a:lnSpc>
           <a:spcPct val="90000"/>
         </a:lnSpc>
@@ -3239,7 +3239,7 @@
           <a:spcPct val="0"/>
         </a:spcBef>
         <a:buNone/>
-        <a:defRPr sz="13858" kern="1200">
+        <a:defRPr sz="9093" kern="1200">
           <a:solidFill>
             <a:schemeClr val="tx1"/>
           </a:solidFill>
@@ -3250,16 +3250,16 @@
       </a:lvl1pPr>
     </p:titleStyle>
     <p:bodyStyle>
-      <a:lvl1pPr marL="719976" indent="-719976" algn="l" defTabSz="2879903" rtl="0" eaLnBrk="1" latinLnBrk="0" hangingPunct="1">
+      <a:lvl1pPr marL="472448" indent="-472448" algn="l" defTabSz="1889790" rtl="0" eaLnBrk="1" latinLnBrk="0" hangingPunct="1">
         <a:lnSpc>
           <a:spcPct val="90000"/>
         </a:lnSpc>
         <a:spcBef>
-          <a:spcPts val="3150"/>
+          <a:spcPts val="2067"/>
         </a:spcBef>
         <a:buFont typeface="Arial" panose="020B0604020202020204" pitchFamily="34" charset="0"/>
         <a:buChar char="•"/>
-        <a:defRPr sz="8819" kern="1200">
+        <a:defRPr sz="5787" kern="1200">
           <a:solidFill>
             <a:schemeClr val="tx1"/>
           </a:solidFill>
@@ -3268,16 +3268,16 @@
           <a:cs typeface="+mn-cs"/>
         </a:defRPr>
       </a:lvl1pPr>
-      <a:lvl2pPr marL="2159927" indent="-719976" algn="l" defTabSz="2879903" rtl="0" eaLnBrk="1" latinLnBrk="0" hangingPunct="1">
+      <a:lvl2pPr marL="1417343" indent="-472448" algn="l" defTabSz="1889790" rtl="0" eaLnBrk="1" latinLnBrk="0" hangingPunct="1">
         <a:lnSpc>
           <a:spcPct val="90000"/>
         </a:lnSpc>
         <a:spcBef>
-          <a:spcPts val="1575"/>
+          <a:spcPts val="1033"/>
         </a:spcBef>
         <a:buFont typeface="Arial" panose="020B0604020202020204" pitchFamily="34" charset="0"/>
         <a:buChar char="•"/>
-        <a:defRPr sz="7559" kern="1200">
+        <a:defRPr sz="4960" kern="1200">
           <a:solidFill>
             <a:schemeClr val="tx1"/>
           </a:solidFill>
@@ -3286,16 +3286,16 @@
           <a:cs typeface="+mn-cs"/>
         </a:defRPr>
       </a:lvl2pPr>
-      <a:lvl3pPr marL="3599879" indent="-719976" algn="l" defTabSz="2879903" rtl="0" eaLnBrk="1" latinLnBrk="0" hangingPunct="1">
+      <a:lvl3pPr marL="2362238" indent="-472448" algn="l" defTabSz="1889790" rtl="0" eaLnBrk="1" latinLnBrk="0" hangingPunct="1">
         <a:lnSpc>
           <a:spcPct val="90000"/>
         </a:lnSpc>
         <a:spcBef>
-          <a:spcPts val="1575"/>
+          <a:spcPts val="1033"/>
         </a:spcBef>
         <a:buFont typeface="Arial" panose="020B0604020202020204" pitchFamily="34" charset="0"/>
         <a:buChar char="•"/>
-        <a:defRPr sz="6299" kern="1200">
+        <a:defRPr sz="4133" kern="1200">
           <a:solidFill>
             <a:schemeClr val="tx1"/>
           </a:solidFill>
@@ -3304,16 +3304,16 @@
           <a:cs typeface="+mn-cs"/>
         </a:defRPr>
       </a:lvl3pPr>
-      <a:lvl4pPr marL="5039830" indent="-719976" algn="l" defTabSz="2879903" rtl="0" eaLnBrk="1" latinLnBrk="0" hangingPunct="1">
+      <a:lvl4pPr marL="3307133" indent="-472448" algn="l" defTabSz="1889790" rtl="0" eaLnBrk="1" latinLnBrk="0" hangingPunct="1">
         <a:lnSpc>
           <a:spcPct val="90000"/>
         </a:lnSpc>
         <a:spcBef>
-          <a:spcPts val="1575"/>
+          <a:spcPts val="1033"/>
         </a:spcBef>
         <a:buFont typeface="Arial" panose="020B0604020202020204" pitchFamily="34" charset="0"/>
         <a:buChar char="•"/>
-        <a:defRPr sz="5669" kern="1200">
+        <a:defRPr sz="3720" kern="1200">
           <a:solidFill>
             <a:schemeClr val="tx1"/>
           </a:solidFill>
@@ -3322,16 +3322,16 @@
           <a:cs typeface="+mn-cs"/>
         </a:defRPr>
       </a:lvl4pPr>
-      <a:lvl5pPr marL="6479781" indent="-719976" algn="l" defTabSz="2879903" rtl="0" eaLnBrk="1" latinLnBrk="0" hangingPunct="1">
+      <a:lvl5pPr marL="4252029" indent="-472448" algn="l" defTabSz="1889790" rtl="0" eaLnBrk="1" latinLnBrk="0" hangingPunct="1">
         <a:lnSpc>
           <a:spcPct val="90000"/>
         </a:lnSpc>
         <a:spcBef>
-          <a:spcPts val="1575"/>
+          <a:spcPts val="1033"/>
         </a:spcBef>
         <a:buFont typeface="Arial" panose="020B0604020202020204" pitchFamily="34" charset="0"/>
         <a:buChar char="•"/>
-        <a:defRPr sz="5669" kern="1200">
+        <a:defRPr sz="3720" kern="1200">
           <a:solidFill>
             <a:schemeClr val="tx1"/>
           </a:solidFill>
@@ -3340,16 +3340,16 @@
           <a:cs typeface="+mn-cs"/>
         </a:defRPr>
       </a:lvl5pPr>
-      <a:lvl6pPr marL="7919733" indent="-719976" algn="l" defTabSz="2879903" rtl="0" eaLnBrk="1" latinLnBrk="0" hangingPunct="1">
+      <a:lvl6pPr marL="5196924" indent="-472448" algn="l" defTabSz="1889790" rtl="0" eaLnBrk="1" latinLnBrk="0" hangingPunct="1">
         <a:lnSpc>
           <a:spcPct val="90000"/>
         </a:lnSpc>
         <a:spcBef>
-          <a:spcPts val="1575"/>
+          <a:spcPts val="1033"/>
         </a:spcBef>
         <a:buFont typeface="Arial" panose="020B0604020202020204" pitchFamily="34" charset="0"/>
         <a:buChar char="•"/>
-        <a:defRPr sz="5669" kern="1200">
+        <a:defRPr sz="3720" kern="1200">
           <a:solidFill>
             <a:schemeClr val="tx1"/>
           </a:solidFill>
@@ -3358,16 +3358,16 @@
           <a:cs typeface="+mn-cs"/>
         </a:defRPr>
       </a:lvl6pPr>
-      <a:lvl7pPr marL="9359684" indent="-719976" algn="l" defTabSz="2879903" rtl="0" eaLnBrk="1" latinLnBrk="0" hangingPunct="1">
+      <a:lvl7pPr marL="6141819" indent="-472448" algn="l" defTabSz="1889790" rtl="0" eaLnBrk="1" latinLnBrk="0" hangingPunct="1">
         <a:lnSpc>
           <a:spcPct val="90000"/>
         </a:lnSpc>
         <a:spcBef>
-          <a:spcPts val="1575"/>
+          <a:spcPts val="1033"/>
         </a:spcBef>
         <a:buFont typeface="Arial" panose="020B0604020202020204" pitchFamily="34" charset="0"/>
         <a:buChar char="•"/>
-        <a:defRPr sz="5669" kern="1200">
+        <a:defRPr sz="3720" kern="1200">
           <a:solidFill>
             <a:schemeClr val="tx1"/>
           </a:solidFill>
@@ -3376,16 +3376,16 @@
           <a:cs typeface="+mn-cs"/>
         </a:defRPr>
       </a:lvl7pPr>
-      <a:lvl8pPr marL="10799636" indent="-719976" algn="l" defTabSz="2879903" rtl="0" eaLnBrk="1" latinLnBrk="0" hangingPunct="1">
+      <a:lvl8pPr marL="7086714" indent="-472448" algn="l" defTabSz="1889790" rtl="0" eaLnBrk="1" latinLnBrk="0" hangingPunct="1">
         <a:lnSpc>
           <a:spcPct val="90000"/>
         </a:lnSpc>
         <a:spcBef>
-          <a:spcPts val="1575"/>
+          <a:spcPts val="1033"/>
         </a:spcBef>
         <a:buFont typeface="Arial" panose="020B0604020202020204" pitchFamily="34" charset="0"/>
         <a:buChar char="•"/>
-        <a:defRPr sz="5669" kern="1200">
+        <a:defRPr sz="3720" kern="1200">
           <a:solidFill>
             <a:schemeClr val="tx1"/>
           </a:solidFill>
@@ -3394,16 +3394,16 @@
           <a:cs typeface="+mn-cs"/>
         </a:defRPr>
       </a:lvl8pPr>
-      <a:lvl9pPr marL="12239587" indent="-719976" algn="l" defTabSz="2879903" rtl="0" eaLnBrk="1" latinLnBrk="0" hangingPunct="1">
+      <a:lvl9pPr marL="8031610" indent="-472448" algn="l" defTabSz="1889790" rtl="0" eaLnBrk="1" latinLnBrk="0" hangingPunct="1">
         <a:lnSpc>
           <a:spcPct val="90000"/>
         </a:lnSpc>
         <a:spcBef>
-          <a:spcPts val="1575"/>
+          <a:spcPts val="1033"/>
         </a:spcBef>
         <a:buFont typeface="Arial" panose="020B0604020202020204" pitchFamily="34" charset="0"/>
         <a:buChar char="•"/>
-        <a:defRPr sz="5669" kern="1200">
+        <a:defRPr sz="3720" kern="1200">
           <a:solidFill>
             <a:schemeClr val="tx1"/>
           </a:solidFill>
@@ -3417,8 +3417,8 @@
       <a:defPPr>
         <a:defRPr lang="en-US"/>
       </a:defPPr>
-      <a:lvl1pPr marL="0" algn="l" defTabSz="2879903" rtl="0" eaLnBrk="1" latinLnBrk="0" hangingPunct="1">
-        <a:defRPr sz="5669" kern="1200">
+      <a:lvl1pPr marL="0" algn="l" defTabSz="1889790" rtl="0" eaLnBrk="1" latinLnBrk="0" hangingPunct="1">
+        <a:defRPr sz="3720" kern="1200">
           <a:solidFill>
             <a:schemeClr val="tx1"/>
           </a:solidFill>
@@ -3427,8 +3427,8 @@
           <a:cs typeface="+mn-cs"/>
         </a:defRPr>
       </a:lvl1pPr>
-      <a:lvl2pPr marL="1439951" algn="l" defTabSz="2879903" rtl="0" eaLnBrk="1" latinLnBrk="0" hangingPunct="1">
-        <a:defRPr sz="5669" kern="1200">
+      <a:lvl2pPr marL="944895" algn="l" defTabSz="1889790" rtl="0" eaLnBrk="1" latinLnBrk="0" hangingPunct="1">
+        <a:defRPr sz="3720" kern="1200">
           <a:solidFill>
             <a:schemeClr val="tx1"/>
           </a:solidFill>
@@ -3437,8 +3437,8 @@
           <a:cs typeface="+mn-cs"/>
         </a:defRPr>
       </a:lvl2pPr>
-      <a:lvl3pPr marL="2879903" algn="l" defTabSz="2879903" rtl="0" eaLnBrk="1" latinLnBrk="0" hangingPunct="1">
-        <a:defRPr sz="5669" kern="1200">
+      <a:lvl3pPr marL="1889790" algn="l" defTabSz="1889790" rtl="0" eaLnBrk="1" latinLnBrk="0" hangingPunct="1">
+        <a:defRPr sz="3720" kern="1200">
           <a:solidFill>
             <a:schemeClr val="tx1"/>
           </a:solidFill>
@@ -3447,8 +3447,8 @@
           <a:cs typeface="+mn-cs"/>
         </a:defRPr>
       </a:lvl3pPr>
-      <a:lvl4pPr marL="4319854" algn="l" defTabSz="2879903" rtl="0" eaLnBrk="1" latinLnBrk="0" hangingPunct="1">
-        <a:defRPr sz="5669" kern="1200">
+      <a:lvl4pPr marL="2834686" algn="l" defTabSz="1889790" rtl="0" eaLnBrk="1" latinLnBrk="0" hangingPunct="1">
+        <a:defRPr sz="3720" kern="1200">
           <a:solidFill>
             <a:schemeClr val="tx1"/>
           </a:solidFill>
@@ -3457,8 +3457,8 @@
           <a:cs typeface="+mn-cs"/>
         </a:defRPr>
       </a:lvl4pPr>
-      <a:lvl5pPr marL="5759806" algn="l" defTabSz="2879903" rtl="0" eaLnBrk="1" latinLnBrk="0" hangingPunct="1">
-        <a:defRPr sz="5669" kern="1200">
+      <a:lvl5pPr marL="3779581" algn="l" defTabSz="1889790" rtl="0" eaLnBrk="1" latinLnBrk="0" hangingPunct="1">
+        <a:defRPr sz="3720" kern="1200">
           <a:solidFill>
             <a:schemeClr val="tx1"/>
           </a:solidFill>
@@ -3467,8 +3467,8 @@
           <a:cs typeface="+mn-cs"/>
         </a:defRPr>
       </a:lvl5pPr>
-      <a:lvl6pPr marL="7199757" algn="l" defTabSz="2879903" rtl="0" eaLnBrk="1" latinLnBrk="0" hangingPunct="1">
-        <a:defRPr sz="5669" kern="1200">
+      <a:lvl6pPr marL="4724476" algn="l" defTabSz="1889790" rtl="0" eaLnBrk="1" latinLnBrk="0" hangingPunct="1">
+        <a:defRPr sz="3720" kern="1200">
           <a:solidFill>
             <a:schemeClr val="tx1"/>
           </a:solidFill>
@@ -3477,8 +3477,8 @@
           <a:cs typeface="+mn-cs"/>
         </a:defRPr>
       </a:lvl6pPr>
-      <a:lvl7pPr marL="8639708" algn="l" defTabSz="2879903" rtl="0" eaLnBrk="1" latinLnBrk="0" hangingPunct="1">
-        <a:defRPr sz="5669" kern="1200">
+      <a:lvl7pPr marL="5669371" algn="l" defTabSz="1889790" rtl="0" eaLnBrk="1" latinLnBrk="0" hangingPunct="1">
+        <a:defRPr sz="3720" kern="1200">
           <a:solidFill>
             <a:schemeClr val="tx1"/>
           </a:solidFill>
@@ -3487,8 +3487,8 @@
           <a:cs typeface="+mn-cs"/>
         </a:defRPr>
       </a:lvl7pPr>
-      <a:lvl8pPr marL="10079660" algn="l" defTabSz="2879903" rtl="0" eaLnBrk="1" latinLnBrk="0" hangingPunct="1">
-        <a:defRPr sz="5669" kern="1200">
+      <a:lvl8pPr marL="6614267" algn="l" defTabSz="1889790" rtl="0" eaLnBrk="1" latinLnBrk="0" hangingPunct="1">
+        <a:defRPr sz="3720" kern="1200">
           <a:solidFill>
             <a:schemeClr val="tx1"/>
           </a:solidFill>
@@ -3497,8 +3497,8 @@
           <a:cs typeface="+mn-cs"/>
         </a:defRPr>
       </a:lvl8pPr>
-      <a:lvl9pPr marL="11519611" algn="l" defTabSz="2879903" rtl="0" eaLnBrk="1" latinLnBrk="0" hangingPunct="1">
-        <a:defRPr sz="5669" kern="1200">
+      <a:lvl9pPr marL="7559162" algn="l" defTabSz="1889790" rtl="0" eaLnBrk="1" latinLnBrk="0" hangingPunct="1">
+        <a:defRPr sz="3720" kern="1200">
           <a:solidFill>
             <a:schemeClr val="tx1"/>
           </a:solidFill>
@@ -3543,7 +3543,7 @@
         </p:nvSpPr>
         <p:spPr>
           <a:xfrm>
-            <a:off x="7228748" y="2318662"/>
+            <a:off x="7228748" y="-1394500"/>
             <a:ext cx="10482932" cy="15120257"/>
           </a:xfrm>
           <a:prstGeom prst="rect">
@@ -3597,7 +3597,7 @@
         </p:nvSpPr>
         <p:spPr>
           <a:xfrm>
-            <a:off x="-3244510" y="2318658"/>
+            <a:off x="-3244510" y="-1394504"/>
             <a:ext cx="10482932" cy="15120257"/>
           </a:xfrm>
           <a:prstGeom prst="rect">
@@ -3683,7 +3683,7 @@
         </p:nvCxnSpPr>
         <p:spPr>
           <a:xfrm>
-            <a:off x="4930510" y="7393149"/>
+            <a:off x="4930512" y="3679987"/>
             <a:ext cx="5601691" cy="0"/>
           </a:xfrm>
           <a:prstGeom prst="line">
@@ -3719,7 +3719,7 @@
         </p:nvSpPr>
         <p:spPr>
           <a:xfrm>
-            <a:off x="10048121" y="6436898"/>
+            <a:off x="10048123" y="2723738"/>
             <a:ext cx="370541" cy="940335"/>
           </a:xfrm>
           <a:prstGeom prst="rect">
@@ -3767,7 +3767,7 @@
         </p:nvCxnSpPr>
         <p:spPr>
           <a:xfrm>
-            <a:off x="8795012" y="7176100"/>
+            <a:off x="8795012" y="3462938"/>
             <a:ext cx="608106" cy="0"/>
           </a:xfrm>
           <a:prstGeom prst="line">
@@ -3809,7 +3809,7 @@
         </p:nvSpPr>
         <p:spPr>
           <a:xfrm>
-            <a:off x="9600582" y="7212690"/>
+            <a:off x="9600582" y="3499528"/>
             <a:ext cx="168298" cy="168298"/>
           </a:xfrm>
           <a:prstGeom prst="ellipse">
@@ -3855,7 +3855,7 @@
         </p:nvSpPr>
         <p:spPr>
           <a:xfrm>
-            <a:off x="5064593" y="6914628"/>
+            <a:off x="5064593" y="3201466"/>
             <a:ext cx="464094" cy="464094"/>
           </a:xfrm>
           <a:prstGeom prst="ellipse">
@@ -3901,7 +3901,7 @@
         </p:nvSpPr>
         <p:spPr>
           <a:xfrm>
-            <a:off x="9500385" y="7021325"/>
+            <a:off x="9500385" y="3308163"/>
             <a:ext cx="355688" cy="355688"/>
           </a:xfrm>
           <a:prstGeom prst="ellipse">
@@ -3953,7 +3953,7 @@
         </p:nvCxnSpPr>
         <p:spPr>
           <a:xfrm flipV="1">
-            <a:off x="9668683" y="7025293"/>
+            <a:off x="9668683" y="3312131"/>
             <a:ext cx="0" cy="178778"/>
           </a:xfrm>
           <a:prstGeom prst="straightConnector1">
@@ -3998,7 +3998,7 @@
         </p:nvCxnSpPr>
         <p:spPr>
           <a:xfrm rot="-1200000" flipH="1" flipV="1">
-            <a:off x="9532602" y="7105208"/>
+            <a:off x="9532604" y="3392046"/>
             <a:ext cx="91839" cy="146292"/>
           </a:xfrm>
           <a:prstGeom prst="straightConnector1">
@@ -4043,7 +4043,7 @@
         </p:nvCxnSpPr>
         <p:spPr>
           <a:xfrm rot="1200000" flipV="1">
-            <a:off x="9773378" y="7070085"/>
+            <a:off x="9773378" y="3356923"/>
             <a:ext cx="0" cy="178778"/>
           </a:xfrm>
           <a:prstGeom prst="straightConnector1">
@@ -4086,7 +4086,7 @@
         </p:nvSpPr>
         <p:spPr>
           <a:xfrm>
-            <a:off x="8312564" y="7021325"/>
+            <a:off x="8312564" y="3308163"/>
             <a:ext cx="355688" cy="355688"/>
           </a:xfrm>
           <a:prstGeom prst="ellipse">
@@ -4136,7 +4136,7 @@
         </p:nvSpPr>
         <p:spPr>
           <a:xfrm>
-            <a:off x="4926703" y="6653859"/>
+            <a:off x="4926703" y="2940697"/>
             <a:ext cx="739298" cy="739298"/>
           </a:xfrm>
           <a:prstGeom prst="ellipse">
@@ -4188,7 +4188,7 @@
         </p:nvCxnSpPr>
         <p:spPr>
           <a:xfrm flipH="1" flipV="1">
-            <a:off x="5280449" y="6669767"/>
+            <a:off x="5280449" y="2956607"/>
             <a:ext cx="4420" cy="233997"/>
           </a:xfrm>
           <a:prstGeom prst="straightConnector1">
@@ -4233,7 +4233,7 @@
         </p:nvCxnSpPr>
         <p:spPr>
           <a:xfrm rot="3000000" flipH="1" flipV="1">
-            <a:off x="5528485" y="6793233"/>
+            <a:off x="5528485" y="3080073"/>
             <a:ext cx="4420" cy="197997"/>
           </a:xfrm>
           <a:prstGeom prst="straightConnector1">
@@ -4278,7 +4278,7 @@
         </p:nvCxnSpPr>
         <p:spPr>
           <a:xfrm rot="-3000000" flipH="1" flipV="1">
-            <a:off x="5062386" y="6801184"/>
+            <a:off x="5062386" y="3088024"/>
             <a:ext cx="4420" cy="197997"/>
           </a:xfrm>
           <a:prstGeom prst="straightConnector1">
@@ -4323,7 +4323,7 @@
         </p:nvCxnSpPr>
         <p:spPr>
           <a:xfrm>
-            <a:off x="4926705" y="9194615"/>
+            <a:off x="4926707" y="5481453"/>
             <a:ext cx="5601691" cy="0"/>
           </a:xfrm>
           <a:prstGeom prst="line">
@@ -4359,7 +4359,7 @@
         </p:nvSpPr>
         <p:spPr>
           <a:xfrm>
-            <a:off x="10044313" y="8238361"/>
+            <a:off x="10044315" y="4525201"/>
             <a:ext cx="370541" cy="940335"/>
           </a:xfrm>
           <a:prstGeom prst="rect">
@@ -4405,7 +4405,7 @@
         </p:nvSpPr>
         <p:spPr>
           <a:xfrm>
-            <a:off x="6709182" y="8007774"/>
+            <a:off x="6709184" y="4294614"/>
             <a:ext cx="1786965" cy="985829"/>
           </a:xfrm>
           <a:custGeom>
@@ -4492,7 +4492,7 @@
         </p:nvCxnSpPr>
         <p:spPr>
           <a:xfrm>
-            <a:off x="8496134" y="8977564"/>
+            <a:off x="8496134" y="5264402"/>
             <a:ext cx="903176" cy="0"/>
           </a:xfrm>
           <a:prstGeom prst="line">
@@ -4535,7 +4535,7 @@
         </p:nvCxnSpPr>
         <p:spPr>
           <a:xfrm>
-            <a:off x="8795010" y="8882405"/>
+            <a:off x="8795012" y="5169243"/>
             <a:ext cx="508887" cy="0"/>
           </a:xfrm>
           <a:prstGeom prst="straightConnector1">
@@ -4580,7 +4580,7 @@
         </p:nvCxnSpPr>
         <p:spPr>
           <a:xfrm rot="10800000">
-            <a:off x="8795010" y="9059411"/>
+            <a:off x="8795012" y="5346249"/>
             <a:ext cx="508887" cy="0"/>
           </a:xfrm>
           <a:prstGeom prst="straightConnector1">
@@ -4626,7 +4626,7 @@
         </p:nvCxnSpPr>
         <p:spPr>
           <a:xfrm flipH="1" flipV="1">
-            <a:off x="6131329" y="8977584"/>
+            <a:off x="6131329" y="5264424"/>
             <a:ext cx="577846" cy="16033"/>
           </a:xfrm>
           <a:prstGeom prst="straightConnector1">
@@ -4668,7 +4668,7 @@
         </p:nvSpPr>
         <p:spPr>
           <a:xfrm>
-            <a:off x="9496578" y="8822783"/>
+            <a:off x="9496578" y="5109621"/>
             <a:ext cx="355688" cy="355688"/>
           </a:xfrm>
           <a:prstGeom prst="ellipse">
@@ -4723,7 +4723,7 @@
         </p:nvSpPr>
         <p:spPr>
           <a:xfrm>
-            <a:off x="8308759" y="8822783"/>
+            <a:off x="8308759" y="5109621"/>
             <a:ext cx="355688" cy="355688"/>
           </a:xfrm>
           <a:prstGeom prst="ellipse">
@@ -4773,7 +4773,7 @@
         </p:nvSpPr>
         <p:spPr>
           <a:xfrm>
-            <a:off x="5765276" y="8822783"/>
+            <a:off x="5765276" y="5109621"/>
             <a:ext cx="355688" cy="355688"/>
           </a:xfrm>
           <a:prstGeom prst="ellipse">
@@ -4823,7 +4823,7 @@
         </p:nvSpPr>
         <p:spPr>
           <a:xfrm>
-            <a:off x="4922897" y="8455318"/>
+            <a:off x="4922897" y="4742156"/>
             <a:ext cx="739298" cy="739298"/>
           </a:xfrm>
           <a:prstGeom prst="ellipse">
@@ -4880,7 +4880,7 @@
         </p:nvCxnSpPr>
         <p:spPr>
           <a:xfrm>
-            <a:off x="-882326" y="7393149"/>
+            <a:off x="-882326" y="3679987"/>
             <a:ext cx="5601691" cy="0"/>
           </a:xfrm>
           <a:prstGeom prst="line">
@@ -4916,7 +4916,7 @@
         </p:nvSpPr>
         <p:spPr>
           <a:xfrm>
-            <a:off x="1619654" y="6436896"/>
+            <a:off x="1619656" y="2723736"/>
             <a:ext cx="370541" cy="940335"/>
           </a:xfrm>
           <a:prstGeom prst="rect">
@@ -4964,7 +4964,7 @@
         </p:nvCxnSpPr>
         <p:spPr>
           <a:xfrm>
-            <a:off x="2982183" y="7176100"/>
+            <a:off x="2982183" y="3462938"/>
             <a:ext cx="608106" cy="0"/>
           </a:xfrm>
           <a:prstGeom prst="line">
@@ -5006,7 +5006,7 @@
         </p:nvSpPr>
         <p:spPr>
           <a:xfrm>
-            <a:off x="3787740" y="7212690"/>
+            <a:off x="3787740" y="3499528"/>
             <a:ext cx="168298" cy="168298"/>
           </a:xfrm>
           <a:prstGeom prst="ellipse">
@@ -5052,7 +5052,7 @@
         </p:nvSpPr>
         <p:spPr>
           <a:xfrm>
-            <a:off x="-748235" y="6914628"/>
+            <a:off x="-748235" y="3201466"/>
             <a:ext cx="464094" cy="464094"/>
           </a:xfrm>
           <a:prstGeom prst="ellipse">
@@ -5098,7 +5098,7 @@
         </p:nvSpPr>
         <p:spPr>
           <a:xfrm>
-            <a:off x="3687548" y="7021325"/>
+            <a:off x="3687548" y="3308163"/>
             <a:ext cx="355688" cy="355688"/>
           </a:xfrm>
           <a:prstGeom prst="ellipse">
@@ -5150,7 +5150,7 @@
         </p:nvCxnSpPr>
         <p:spPr>
           <a:xfrm flipV="1">
-            <a:off x="3855843" y="7025293"/>
+            <a:off x="3855843" y="3312131"/>
             <a:ext cx="0" cy="178778"/>
           </a:xfrm>
           <a:prstGeom prst="straightConnector1">
@@ -5195,7 +5195,7 @@
         </p:nvCxnSpPr>
         <p:spPr>
           <a:xfrm rot="-1200000" flipH="1" flipV="1">
-            <a:off x="3719764" y="7105208"/>
+            <a:off x="3719766" y="3392046"/>
             <a:ext cx="91839" cy="146292"/>
           </a:xfrm>
           <a:prstGeom prst="straightConnector1">
@@ -5240,7 +5240,7 @@
         </p:nvCxnSpPr>
         <p:spPr>
           <a:xfrm rot="1200000" flipV="1">
-            <a:off x="3960540" y="7070085"/>
+            <a:off x="3960540" y="3356923"/>
             <a:ext cx="0" cy="178778"/>
           </a:xfrm>
           <a:prstGeom prst="straightConnector1">
@@ -5283,7 +5283,7 @@
         </p:nvSpPr>
         <p:spPr>
           <a:xfrm>
-            <a:off x="2499723" y="7021325"/>
+            <a:off x="2499723" y="3308163"/>
             <a:ext cx="355688" cy="355688"/>
           </a:xfrm>
           <a:prstGeom prst="ellipse">
@@ -5333,7 +5333,7 @@
         </p:nvSpPr>
         <p:spPr>
           <a:xfrm>
-            <a:off x="-886133" y="6653859"/>
+            <a:off x="-886133" y="2940697"/>
             <a:ext cx="739298" cy="739298"/>
           </a:xfrm>
           <a:prstGeom prst="ellipse">
@@ -5385,7 +5385,7 @@
         </p:nvCxnSpPr>
         <p:spPr>
           <a:xfrm flipH="1" flipV="1">
-            <a:off x="-532394" y="6669767"/>
+            <a:off x="-532394" y="2956607"/>
             <a:ext cx="4420" cy="233997"/>
           </a:xfrm>
           <a:prstGeom prst="straightConnector1">
@@ -5430,7 +5430,7 @@
         </p:nvCxnSpPr>
         <p:spPr>
           <a:xfrm rot="3000000" flipH="1" flipV="1">
-            <a:off x="-284342" y="6793231"/>
+            <a:off x="-284342" y="3080071"/>
             <a:ext cx="4420" cy="197997"/>
           </a:xfrm>
           <a:prstGeom prst="straightConnector1">
@@ -5475,7 +5475,7 @@
         </p:nvCxnSpPr>
         <p:spPr>
           <a:xfrm rot="-3000000" flipH="1" flipV="1">
-            <a:off x="-750457" y="6801184"/>
+            <a:off x="-750457" y="3088024"/>
             <a:ext cx="4420" cy="197997"/>
           </a:xfrm>
           <a:prstGeom prst="straightConnector1">
@@ -5520,7 +5520,7 @@
         </p:nvCxnSpPr>
         <p:spPr>
           <a:xfrm>
-            <a:off x="-886132" y="9194615"/>
+            <a:off x="-886132" y="5481453"/>
             <a:ext cx="5601691" cy="0"/>
           </a:xfrm>
           <a:prstGeom prst="line">
@@ -5556,7 +5556,7 @@
         </p:nvSpPr>
         <p:spPr>
           <a:xfrm>
-            <a:off x="1615848" y="8238359"/>
+            <a:off x="1615850" y="4525199"/>
             <a:ext cx="370541" cy="940335"/>
           </a:xfrm>
           <a:prstGeom prst="rect">
@@ -5602,7 +5602,7 @@
         </p:nvSpPr>
         <p:spPr>
           <a:xfrm>
-            <a:off x="896339" y="8007772"/>
+            <a:off x="896341" y="4294612"/>
             <a:ext cx="1786965" cy="985829"/>
           </a:xfrm>
           <a:custGeom>
@@ -5689,7 +5689,7 @@
         </p:nvCxnSpPr>
         <p:spPr>
           <a:xfrm>
-            <a:off x="2683292" y="8977564"/>
+            <a:off x="2683292" y="5264402"/>
             <a:ext cx="903176" cy="0"/>
           </a:xfrm>
           <a:prstGeom prst="line">
@@ -5732,7 +5732,7 @@
         </p:nvCxnSpPr>
         <p:spPr>
           <a:xfrm>
-            <a:off x="2982174" y="8882405"/>
+            <a:off x="2982176" y="5169243"/>
             <a:ext cx="508887" cy="0"/>
           </a:xfrm>
           <a:prstGeom prst="straightConnector1">
@@ -5777,7 +5777,7 @@
         </p:nvCxnSpPr>
         <p:spPr>
           <a:xfrm rot="10800000">
-            <a:off x="2982174" y="9059411"/>
+            <a:off x="2982176" y="5346249"/>
             <a:ext cx="508887" cy="0"/>
           </a:xfrm>
           <a:prstGeom prst="straightConnector1">
@@ -5823,7 +5823,7 @@
         </p:nvCxnSpPr>
         <p:spPr>
           <a:xfrm flipH="1" flipV="1">
-            <a:off x="318486" y="8977582"/>
+            <a:off x="318486" y="5264422"/>
             <a:ext cx="577846" cy="16033"/>
           </a:xfrm>
           <a:prstGeom prst="straightConnector1">
@@ -5865,7 +5865,7 @@
         </p:nvSpPr>
         <p:spPr>
           <a:xfrm>
-            <a:off x="3683741" y="8822783"/>
+            <a:off x="3683741" y="5109621"/>
             <a:ext cx="355688" cy="355688"/>
           </a:xfrm>
           <a:prstGeom prst="ellipse">
@@ -5920,7 +5920,7 @@
         </p:nvSpPr>
         <p:spPr>
           <a:xfrm>
-            <a:off x="2495916" y="8822783"/>
+            <a:off x="2495916" y="5109621"/>
             <a:ext cx="355688" cy="355688"/>
           </a:xfrm>
           <a:prstGeom prst="ellipse">
@@ -5970,7 +5970,7 @@
         </p:nvSpPr>
         <p:spPr>
           <a:xfrm>
-            <a:off x="-47566" y="8822783"/>
+            <a:off x="-47566" y="5109621"/>
             <a:ext cx="355688" cy="355688"/>
           </a:xfrm>
           <a:prstGeom prst="ellipse">
@@ -6020,7 +6020,7 @@
         </p:nvSpPr>
         <p:spPr>
           <a:xfrm>
-            <a:off x="-889937" y="8455318"/>
+            <a:off x="-889937" y="4742156"/>
             <a:ext cx="739298" cy="739298"/>
           </a:xfrm>
           <a:prstGeom prst="ellipse">
@@ -6077,7 +6077,7 @@
         </p:nvCxnSpPr>
         <p:spPr>
           <a:xfrm>
-            <a:off x="-872362" y="13101120"/>
+            <a:off x="-872362" y="9387958"/>
             <a:ext cx="5601691" cy="0"/>
           </a:xfrm>
           <a:prstGeom prst="line">
@@ -6113,7 +6113,7 @@
         </p:nvSpPr>
         <p:spPr>
           <a:xfrm>
-            <a:off x="910110" y="11914279"/>
+            <a:off x="910112" y="8201119"/>
             <a:ext cx="1786965" cy="985829"/>
           </a:xfrm>
           <a:custGeom>
@@ -6200,7 +6200,7 @@
         </p:nvCxnSpPr>
         <p:spPr>
           <a:xfrm>
-            <a:off x="2697063" y="12884069"/>
+            <a:off x="2697063" y="9170907"/>
             <a:ext cx="903176" cy="0"/>
           </a:xfrm>
           <a:prstGeom prst="line">
@@ -6243,7 +6243,7 @@
         </p:nvCxnSpPr>
         <p:spPr>
           <a:xfrm>
-            <a:off x="2995943" y="12788911"/>
+            <a:off x="2995945" y="9075749"/>
             <a:ext cx="508887" cy="0"/>
           </a:xfrm>
           <a:prstGeom prst="straightConnector1">
@@ -6288,7 +6288,7 @@
         </p:nvCxnSpPr>
         <p:spPr>
           <a:xfrm rot="10800000">
-            <a:off x="2995943" y="12965915"/>
+            <a:off x="2995945" y="9252753"/>
             <a:ext cx="508887" cy="0"/>
           </a:xfrm>
           <a:prstGeom prst="straightConnector1">
@@ -6334,7 +6334,7 @@
         </p:nvCxnSpPr>
         <p:spPr>
           <a:xfrm flipH="1" flipV="1">
-            <a:off x="332258" y="12884088"/>
+            <a:off x="332258" y="9170928"/>
             <a:ext cx="577846" cy="16033"/>
           </a:xfrm>
           <a:prstGeom prst="straightConnector1">
@@ -6376,7 +6376,7 @@
         </p:nvSpPr>
         <p:spPr>
           <a:xfrm>
-            <a:off x="3697514" y="12729288"/>
+            <a:off x="3697514" y="9016126"/>
             <a:ext cx="355688" cy="355688"/>
           </a:xfrm>
           <a:prstGeom prst="ellipse">
@@ -6431,7 +6431,7 @@
         </p:nvSpPr>
         <p:spPr>
           <a:xfrm>
-            <a:off x="-33794" y="12729288"/>
+            <a:off x="-33794" y="9016126"/>
             <a:ext cx="355688" cy="355688"/>
           </a:xfrm>
           <a:prstGeom prst="ellipse">
@@ -6481,7 +6481,7 @@
         </p:nvSpPr>
         <p:spPr>
           <a:xfrm>
-            <a:off x="-876166" y="12361824"/>
+            <a:off x="-876166" y="8648662"/>
             <a:ext cx="739298" cy="739298"/>
           </a:xfrm>
           <a:prstGeom prst="ellipse">
@@ -6538,7 +6538,7 @@
         </p:nvCxnSpPr>
         <p:spPr>
           <a:xfrm>
-            <a:off x="-872362" y="11110951"/>
+            <a:off x="-872362" y="7397789"/>
             <a:ext cx="5601691" cy="0"/>
           </a:xfrm>
           <a:prstGeom prst="line">
@@ -6574,7 +6574,7 @@
         </p:nvSpPr>
         <p:spPr>
           <a:xfrm>
-            <a:off x="3697514" y="10739119"/>
+            <a:off x="3697514" y="7025957"/>
             <a:ext cx="355688" cy="355688"/>
           </a:xfrm>
           <a:prstGeom prst="ellipse">
@@ -6629,7 +6629,7 @@
         </p:nvSpPr>
         <p:spPr>
           <a:xfrm>
-            <a:off x="-33794" y="10739119"/>
+            <a:off x="-33794" y="7025957"/>
             <a:ext cx="355688" cy="355688"/>
           </a:xfrm>
           <a:prstGeom prst="ellipse">
@@ -6679,7 +6679,7 @@
         </p:nvSpPr>
         <p:spPr>
           <a:xfrm>
-            <a:off x="-876166" y="10371662"/>
+            <a:off x="-876166" y="6658500"/>
             <a:ext cx="739298" cy="739298"/>
           </a:xfrm>
           <a:prstGeom prst="ellipse">
@@ -6736,7 +6736,7 @@
         </p:nvCxnSpPr>
         <p:spPr>
           <a:xfrm flipH="1">
-            <a:off x="444881" y="10916954"/>
+            <a:off x="444883" y="7203792"/>
             <a:ext cx="3143621" cy="0"/>
           </a:xfrm>
           <a:prstGeom prst="straightConnector1">
@@ -6775,7 +6775,7 @@
         </p:nvSpPr>
         <p:spPr>
           <a:xfrm>
-            <a:off x="-533362" y="3826748"/>
+            <a:off x="-533362" y="113586"/>
             <a:ext cx="5128327" cy="707886"/>
           </a:xfrm>
           <a:prstGeom prst="rect">
@@ -6813,7 +6813,7 @@
         </p:nvSpPr>
         <p:spPr>
           <a:xfrm>
-            <a:off x="5415276" y="3823114"/>
+            <a:off x="5415278" y="109952"/>
             <a:ext cx="3932487" cy="707886"/>
           </a:xfrm>
           <a:prstGeom prst="rect">
@@ -6851,7 +6851,7 @@
         </p:nvSpPr>
         <p:spPr>
           <a:xfrm>
-            <a:off x="-615346" y="4385201"/>
+            <a:off x="-615346" y="672039"/>
             <a:ext cx="5484771" cy="707886"/>
           </a:xfrm>
           <a:prstGeom prst="rect">
@@ -6889,7 +6889,7 @@
         </p:nvSpPr>
         <p:spPr>
           <a:xfrm>
-            <a:off x="5046776" y="4380421"/>
+            <a:off x="5046776" y="667259"/>
             <a:ext cx="5997732" cy="707886"/>
           </a:xfrm>
           <a:prstGeom prst="rect">
@@ -6927,7 +6927,7 @@
         </p:nvSpPr>
         <p:spPr>
           <a:xfrm>
-            <a:off x="13549351" y="1753380"/>
+            <a:off x="13549351" y="-1182701"/>
             <a:ext cx="9950224" cy="707886"/>
           </a:xfrm>
           <a:prstGeom prst="rect">
@@ -6965,7 +6965,7 @@
         </p:nvSpPr>
         <p:spPr>
           <a:xfrm>
-            <a:off x="-217014" y="2626331"/>
+            <a:off x="-217014" y="-1086831"/>
             <a:ext cx="10021590" cy="1323439"/>
           </a:xfrm>
           <a:prstGeom prst="rect">
@@ -7016,7 +7016,7 @@
         </p:nvCxnSpPr>
         <p:spPr>
           <a:xfrm>
-            <a:off x="17541391" y="7451603"/>
+            <a:off x="17541393" y="3738441"/>
             <a:ext cx="5601691" cy="0"/>
           </a:xfrm>
           <a:prstGeom prst="line">
@@ -7052,7 +7052,7 @@
         </p:nvSpPr>
         <p:spPr>
           <a:xfrm>
-            <a:off x="22658999" y="6495349"/>
+            <a:off x="22659001" y="2782189"/>
             <a:ext cx="370541" cy="940335"/>
           </a:xfrm>
           <a:prstGeom prst="rect">
@@ -7100,7 +7100,7 @@
         </p:nvCxnSpPr>
         <p:spPr>
           <a:xfrm>
-            <a:off x="21405898" y="7234545"/>
+            <a:off x="21405898" y="3521383"/>
             <a:ext cx="608106" cy="0"/>
           </a:xfrm>
           <a:prstGeom prst="line">
@@ -7142,7 +7142,7 @@
         </p:nvSpPr>
         <p:spPr>
           <a:xfrm>
-            <a:off x="20923443" y="7079772"/>
+            <a:off x="20923443" y="3366610"/>
             <a:ext cx="355688" cy="355688"/>
           </a:xfrm>
           <a:prstGeom prst="ellipse">
@@ -7194,7 +7194,7 @@
         </p:nvCxnSpPr>
         <p:spPr>
           <a:xfrm>
-            <a:off x="17537585" y="9253061"/>
+            <a:off x="17537587" y="5539899"/>
             <a:ext cx="5601691" cy="0"/>
           </a:xfrm>
           <a:prstGeom prst="line">
@@ -7230,7 +7230,7 @@
         </p:nvSpPr>
         <p:spPr>
           <a:xfrm>
-            <a:off x="22655192" y="8296808"/>
+            <a:off x="22655194" y="4583648"/>
             <a:ext cx="370541" cy="940335"/>
           </a:xfrm>
           <a:prstGeom prst="rect">
@@ -7276,7 +7276,7 @@
         </p:nvSpPr>
         <p:spPr>
           <a:xfrm>
-            <a:off x="19320061" y="8066221"/>
+            <a:off x="19320063" y="4353061"/>
             <a:ext cx="1786965" cy="985829"/>
           </a:xfrm>
           <a:custGeom>
@@ -7363,7 +7363,7 @@
         </p:nvCxnSpPr>
         <p:spPr>
           <a:xfrm>
-            <a:off x="21107012" y="9036009"/>
+            <a:off x="21107012" y="5322847"/>
             <a:ext cx="903176" cy="0"/>
           </a:xfrm>
           <a:prstGeom prst="line">
@@ -7407,7 +7407,7 @@
         </p:nvCxnSpPr>
         <p:spPr>
           <a:xfrm flipH="1" flipV="1">
-            <a:off x="18742207" y="9036030"/>
+            <a:off x="18742207" y="5322870"/>
             <a:ext cx="577846" cy="16033"/>
           </a:xfrm>
           <a:prstGeom prst="straightConnector1">
@@ -7449,7 +7449,7 @@
         </p:nvSpPr>
         <p:spPr>
           <a:xfrm>
-            <a:off x="22107456" y="8881229"/>
+            <a:off x="22107456" y="5168067"/>
             <a:ext cx="355688" cy="355688"/>
           </a:xfrm>
           <a:prstGeom prst="ellipse">
@@ -7504,7 +7504,7 @@
         </p:nvSpPr>
         <p:spPr>
           <a:xfrm>
-            <a:off x="20919636" y="8881229"/>
+            <a:off x="20919636" y="5168067"/>
             <a:ext cx="355688" cy="355688"/>
           </a:xfrm>
           <a:prstGeom prst="ellipse">
@@ -7554,7 +7554,7 @@
         </p:nvSpPr>
         <p:spPr>
           <a:xfrm>
-            <a:off x="18376154" y="8881229"/>
+            <a:off x="18376154" y="5168067"/>
             <a:ext cx="355688" cy="355688"/>
           </a:xfrm>
           <a:prstGeom prst="ellipse">
@@ -7604,7 +7604,7 @@
         </p:nvSpPr>
         <p:spPr>
           <a:xfrm>
-            <a:off x="17533776" y="8513771"/>
+            <a:off x="17533776" y="4800609"/>
             <a:ext cx="739298" cy="739298"/>
           </a:xfrm>
           <a:prstGeom prst="ellipse">
@@ -7661,7 +7661,7 @@
         </p:nvCxnSpPr>
         <p:spPr>
           <a:xfrm>
-            <a:off x="11728556" y="7451603"/>
+            <a:off x="11728558" y="3738441"/>
             <a:ext cx="5601691" cy="0"/>
           </a:xfrm>
           <a:prstGeom prst="line">
@@ -7697,7 +7697,7 @@
         </p:nvSpPr>
         <p:spPr>
           <a:xfrm>
-            <a:off x="14230535" y="6495349"/>
+            <a:off x="14230537" y="2782189"/>
             <a:ext cx="370541" cy="940335"/>
           </a:xfrm>
           <a:prstGeom prst="rect">
@@ -7745,7 +7745,7 @@
         </p:nvCxnSpPr>
         <p:spPr>
           <a:xfrm>
-            <a:off x="15593055" y="7234545"/>
+            <a:off x="15593055" y="3521383"/>
             <a:ext cx="608106" cy="0"/>
           </a:xfrm>
           <a:prstGeom prst="line">
@@ -7787,7 +7787,7 @@
         </p:nvSpPr>
         <p:spPr>
           <a:xfrm>
-            <a:off x="15110609" y="7079772"/>
+            <a:off x="15110609" y="3366610"/>
             <a:ext cx="355688" cy="355688"/>
           </a:xfrm>
           <a:prstGeom prst="ellipse">
@@ -7839,7 +7839,7 @@
         </p:nvCxnSpPr>
         <p:spPr>
           <a:xfrm>
-            <a:off x="11724749" y="9253061"/>
+            <a:off x="11724751" y="5539899"/>
             <a:ext cx="5601691" cy="0"/>
           </a:xfrm>
           <a:prstGeom prst="line">
@@ -7875,7 +7875,7 @@
         </p:nvSpPr>
         <p:spPr>
           <a:xfrm>
-            <a:off x="14226737" y="8296808"/>
+            <a:off x="14226739" y="4583648"/>
             <a:ext cx="370541" cy="940335"/>
           </a:xfrm>
           <a:prstGeom prst="rect">
@@ -7921,7 +7921,7 @@
         </p:nvSpPr>
         <p:spPr>
           <a:xfrm>
-            <a:off x="13507220" y="8066221"/>
+            <a:off x="13507222" y="4353061"/>
             <a:ext cx="1786965" cy="985829"/>
           </a:xfrm>
           <a:custGeom>
@@ -8008,7 +8008,7 @@
         </p:nvCxnSpPr>
         <p:spPr>
           <a:xfrm>
-            <a:off x="15294171" y="9036009"/>
+            <a:off x="15294171" y="5322847"/>
             <a:ext cx="903176" cy="0"/>
           </a:xfrm>
           <a:prstGeom prst="line">
@@ -8052,7 +8052,7 @@
         </p:nvCxnSpPr>
         <p:spPr>
           <a:xfrm flipH="1" flipV="1">
-            <a:off x="12929365" y="9036030"/>
+            <a:off x="12929365" y="5322870"/>
             <a:ext cx="577846" cy="16033"/>
           </a:xfrm>
           <a:prstGeom prst="straightConnector1">
@@ -8094,7 +8094,7 @@
         </p:nvSpPr>
         <p:spPr>
           <a:xfrm>
-            <a:off x="16294620" y="8881229"/>
+            <a:off x="16294620" y="5168067"/>
             <a:ext cx="355688" cy="355688"/>
           </a:xfrm>
           <a:prstGeom prst="ellipse">
@@ -8149,7 +8149,7 @@
         </p:nvSpPr>
         <p:spPr>
           <a:xfrm>
-            <a:off x="15106803" y="8881229"/>
+            <a:off x="15106803" y="5168067"/>
             <a:ext cx="355688" cy="355688"/>
           </a:xfrm>
           <a:prstGeom prst="ellipse">
@@ -8199,7 +8199,7 @@
         </p:nvSpPr>
         <p:spPr>
           <a:xfrm>
-            <a:off x="12563313" y="8881229"/>
+            <a:off x="12563313" y="5168067"/>
             <a:ext cx="355688" cy="355688"/>
           </a:xfrm>
           <a:prstGeom prst="ellipse">
@@ -8249,7 +8249,7 @@
         </p:nvSpPr>
         <p:spPr>
           <a:xfrm>
-            <a:off x="11720940" y="8513771"/>
+            <a:off x="11720940" y="4800609"/>
             <a:ext cx="739298" cy="739298"/>
           </a:xfrm>
           <a:prstGeom prst="ellipse">
@@ -8306,7 +8306,7 @@
         </p:nvCxnSpPr>
         <p:spPr>
           <a:xfrm>
-            <a:off x="11756715" y="13445692"/>
+            <a:off x="11756717" y="9732530"/>
             <a:ext cx="5601691" cy="0"/>
           </a:xfrm>
           <a:prstGeom prst="line">
@@ -8342,7 +8342,7 @@
         </p:nvSpPr>
         <p:spPr>
           <a:xfrm>
-            <a:off x="13539185" y="12258852"/>
+            <a:off x="13539187" y="8545692"/>
             <a:ext cx="1786965" cy="985829"/>
           </a:xfrm>
           <a:custGeom>
@@ -8429,7 +8429,7 @@
         </p:nvCxnSpPr>
         <p:spPr>
           <a:xfrm>
-            <a:off x="15326143" y="13228641"/>
+            <a:off x="15326143" y="9515479"/>
             <a:ext cx="903176" cy="0"/>
           </a:xfrm>
           <a:prstGeom prst="line">
@@ -8473,7 +8473,7 @@
         </p:nvCxnSpPr>
         <p:spPr>
           <a:xfrm flipH="1" flipV="1">
-            <a:off x="12961330" y="13228663"/>
+            <a:off x="12961330" y="9515503"/>
             <a:ext cx="577846" cy="16033"/>
           </a:xfrm>
           <a:prstGeom prst="straightConnector1">
@@ -8515,7 +8515,7 @@
         </p:nvSpPr>
         <p:spPr>
           <a:xfrm>
-            <a:off x="16326585" y="13073866"/>
+            <a:off x="16326585" y="9360704"/>
             <a:ext cx="355688" cy="355688"/>
           </a:xfrm>
           <a:prstGeom prst="ellipse">
@@ -8570,7 +8570,7 @@
         </p:nvSpPr>
         <p:spPr>
           <a:xfrm>
-            <a:off x="12595285" y="13073860"/>
+            <a:off x="12595285" y="9360698"/>
             <a:ext cx="355688" cy="355688"/>
           </a:xfrm>
           <a:prstGeom prst="ellipse">
@@ -8620,7 +8620,7 @@
         </p:nvSpPr>
         <p:spPr>
           <a:xfrm>
-            <a:off x="11752906" y="12706402"/>
+            <a:off x="11752906" y="8993240"/>
             <a:ext cx="739298" cy="739298"/>
           </a:xfrm>
           <a:prstGeom prst="ellipse">
@@ -8677,7 +8677,7 @@
         </p:nvCxnSpPr>
         <p:spPr>
           <a:xfrm>
-            <a:off x="11756715" y="11455523"/>
+            <a:off x="11756717" y="7742361"/>
             <a:ext cx="5601691" cy="0"/>
           </a:xfrm>
           <a:prstGeom prst="line">
@@ -8713,7 +8713,7 @@
         </p:nvSpPr>
         <p:spPr>
           <a:xfrm>
-            <a:off x="16326585" y="11083697"/>
+            <a:off x="16326585" y="7370535"/>
             <a:ext cx="355688" cy="355688"/>
           </a:xfrm>
           <a:prstGeom prst="ellipse">
@@ -8768,7 +8768,7 @@
         </p:nvSpPr>
         <p:spPr>
           <a:xfrm>
-            <a:off x="12595285" y="11083697"/>
+            <a:off x="12595285" y="7370535"/>
             <a:ext cx="355688" cy="355688"/>
           </a:xfrm>
           <a:prstGeom prst="ellipse">
@@ -8818,7 +8818,7 @@
         </p:nvSpPr>
         <p:spPr>
           <a:xfrm>
-            <a:off x="11752906" y="10716233"/>
+            <a:off x="11752906" y="7003071"/>
             <a:ext cx="739298" cy="739298"/>
           </a:xfrm>
           <a:prstGeom prst="ellipse">
@@ -8875,7 +8875,7 @@
         </p:nvCxnSpPr>
         <p:spPr>
           <a:xfrm flipH="1">
-            <a:off x="13073963" y="11261532"/>
+            <a:off x="13073965" y="7548370"/>
             <a:ext cx="3143621" cy="0"/>
           </a:xfrm>
           <a:prstGeom prst="straightConnector1">
@@ -8914,7 +8914,7 @@
         </p:nvSpPr>
         <p:spPr>
           <a:xfrm>
-            <a:off x="11730767" y="6707546"/>
+            <a:off x="11730767" y="2994384"/>
             <a:ext cx="739298" cy="739298"/>
           </a:xfrm>
           <a:prstGeom prst="ellipse">
@@ -8969,7 +8969,7 @@
         </p:nvSpPr>
         <p:spPr>
           <a:xfrm>
-            <a:off x="16288733" y="7093370"/>
+            <a:off x="16288733" y="3380208"/>
             <a:ext cx="355688" cy="355688"/>
           </a:xfrm>
           <a:prstGeom prst="ellipse">
@@ -9024,7 +9024,7 @@
         </p:nvSpPr>
         <p:spPr>
           <a:xfrm>
-            <a:off x="17541389" y="6703686"/>
+            <a:off x="17541389" y="2990524"/>
             <a:ext cx="739298" cy="739298"/>
           </a:xfrm>
           <a:prstGeom prst="ellipse">
@@ -9079,7 +9079,7 @@
         </p:nvSpPr>
         <p:spPr>
           <a:xfrm>
-            <a:off x="22106815" y="7084477"/>
+            <a:off x="22106815" y="3371315"/>
             <a:ext cx="355688" cy="355688"/>
           </a:xfrm>
           <a:prstGeom prst="ellipse">
@@ -9134,7 +9134,7 @@
         </p:nvSpPr>
         <p:spPr>
           <a:xfrm>
-            <a:off x="14726147" y="2689993"/>
+            <a:off x="14726149" y="-1023169"/>
             <a:ext cx="7294561" cy="1323439"/>
           </a:xfrm>
           <a:prstGeom prst="rect">
@@ -9183,7 +9183,7 @@
         </p:nvSpPr>
         <p:spPr>
           <a:xfrm>
-            <a:off x="11921715" y="3953386"/>
+            <a:off x="11921717" y="240224"/>
             <a:ext cx="5128327" cy="707886"/>
           </a:xfrm>
           <a:prstGeom prst="rect">
@@ -9221,7 +9221,7 @@
         </p:nvSpPr>
         <p:spPr>
           <a:xfrm>
-            <a:off x="17870343" y="3949753"/>
+            <a:off x="17870345" y="236591"/>
             <a:ext cx="3932487" cy="707886"/>
           </a:xfrm>
           <a:prstGeom prst="rect">
@@ -9259,7 +9259,7 @@
         </p:nvSpPr>
         <p:spPr>
           <a:xfrm>
-            <a:off x="11839724" y="4511839"/>
+            <a:off x="11839726" y="798677"/>
             <a:ext cx="5484771" cy="707886"/>
           </a:xfrm>
           <a:prstGeom prst="rect">
@@ -9297,7 +9297,7 @@
         </p:nvSpPr>
         <p:spPr>
           <a:xfrm>
-            <a:off x="17501842" y="4507054"/>
+            <a:off x="17501842" y="793892"/>
             <a:ext cx="5997732" cy="707886"/>
           </a:xfrm>
           <a:prstGeom prst="rect">
@@ -9337,7 +9337,7 @@
         </p:nvCxnSpPr>
         <p:spPr>
           <a:xfrm>
-            <a:off x="25925972" y="7212738"/>
+            <a:off x="25925974" y="3499576"/>
             <a:ext cx="5601691" cy="0"/>
           </a:xfrm>
           <a:prstGeom prst="line">
@@ -9373,7 +9373,7 @@
         </p:nvSpPr>
         <p:spPr>
           <a:xfrm>
-            <a:off x="28427952" y="6256486"/>
+            <a:off x="28427954" y="2543326"/>
             <a:ext cx="370541" cy="940335"/>
           </a:xfrm>
           <a:prstGeom prst="rect">
@@ -9419,7 +9419,7 @@
         </p:nvSpPr>
         <p:spPr>
           <a:xfrm>
-            <a:off x="30596035" y="7032278"/>
+            <a:off x="30596035" y="3319116"/>
             <a:ext cx="168298" cy="168298"/>
           </a:xfrm>
           <a:prstGeom prst="ellipse">
@@ -9465,7 +9465,7 @@
         </p:nvSpPr>
         <p:spPr>
           <a:xfrm>
-            <a:off x="26060053" y="6734216"/>
+            <a:off x="26060053" y="3021054"/>
             <a:ext cx="464094" cy="464094"/>
           </a:xfrm>
           <a:prstGeom prst="ellipse">
@@ -9511,7 +9511,7 @@
         </p:nvSpPr>
         <p:spPr>
           <a:xfrm>
-            <a:off x="30495837" y="6840908"/>
+            <a:off x="30495837" y="3127746"/>
             <a:ext cx="355688" cy="355688"/>
           </a:xfrm>
           <a:prstGeom prst="ellipse">
@@ -9563,7 +9563,7 @@
         </p:nvCxnSpPr>
         <p:spPr>
           <a:xfrm flipV="1">
-            <a:off x="30664138" y="6844881"/>
+            <a:off x="30664138" y="3131719"/>
             <a:ext cx="0" cy="178778"/>
           </a:xfrm>
           <a:prstGeom prst="straightConnector1">
@@ -9608,7 +9608,7 @@
         </p:nvCxnSpPr>
         <p:spPr>
           <a:xfrm rot="-1200000" flipH="1" flipV="1">
-            <a:off x="30528062" y="6924797"/>
+            <a:off x="30528064" y="3211635"/>
             <a:ext cx="91839" cy="146292"/>
           </a:xfrm>
           <a:prstGeom prst="straightConnector1">
@@ -9653,7 +9653,7 @@
         </p:nvCxnSpPr>
         <p:spPr>
           <a:xfrm rot="1200000" flipV="1">
-            <a:off x="30768837" y="6889673"/>
+            <a:off x="30768837" y="3176511"/>
             <a:ext cx="0" cy="178778"/>
           </a:xfrm>
           <a:prstGeom prst="straightConnector1">
@@ -9696,7 +9696,7 @@
         </p:nvSpPr>
         <p:spPr>
           <a:xfrm>
-            <a:off x="25922156" y="6473447"/>
+            <a:off x="25922156" y="2760285"/>
             <a:ext cx="739298" cy="739298"/>
           </a:xfrm>
           <a:prstGeom prst="ellipse">
@@ -9748,7 +9748,7 @@
         </p:nvCxnSpPr>
         <p:spPr>
           <a:xfrm flipH="1" flipV="1">
-            <a:off x="26275909" y="6489351"/>
+            <a:off x="26275909" y="2776191"/>
             <a:ext cx="4420" cy="233997"/>
           </a:xfrm>
           <a:prstGeom prst="straightConnector1">
@@ -9793,7 +9793,7 @@
         </p:nvCxnSpPr>
         <p:spPr>
           <a:xfrm rot="3000000" flipH="1" flipV="1">
-            <a:off x="26523938" y="6612821"/>
+            <a:off x="26523938" y="2899661"/>
             <a:ext cx="4420" cy="197997"/>
           </a:xfrm>
           <a:prstGeom prst="straightConnector1">
@@ -9838,7 +9838,7 @@
         </p:nvCxnSpPr>
         <p:spPr>
           <a:xfrm rot="-3000000" flipH="1" flipV="1">
-            <a:off x="26057840" y="6620774"/>
+            <a:off x="26057840" y="2907614"/>
             <a:ext cx="4420" cy="197997"/>
           </a:xfrm>
           <a:prstGeom prst="straightConnector1">
@@ -9883,7 +9883,7 @@
         </p:nvCxnSpPr>
         <p:spPr>
           <a:xfrm>
-            <a:off x="25922166" y="9014197"/>
+            <a:off x="25922168" y="5301035"/>
             <a:ext cx="5601691" cy="0"/>
           </a:xfrm>
           <a:prstGeom prst="line">
@@ -9919,7 +9919,7 @@
         </p:nvSpPr>
         <p:spPr>
           <a:xfrm>
-            <a:off x="28424144" y="8057951"/>
+            <a:off x="28424146" y="4344791"/>
             <a:ext cx="370541" cy="940335"/>
           </a:xfrm>
           <a:prstGeom prst="rect">
@@ -9965,7 +9965,7 @@
         </p:nvSpPr>
         <p:spPr>
           <a:xfrm>
-            <a:off x="27704635" y="7827358"/>
+            <a:off x="27704637" y="4114198"/>
             <a:ext cx="1786965" cy="985829"/>
           </a:xfrm>
           <a:custGeom>
@@ -10052,7 +10052,7 @@
         </p:nvCxnSpPr>
         <p:spPr>
           <a:xfrm>
-            <a:off x="29491587" y="8797147"/>
+            <a:off x="29491587" y="5083985"/>
             <a:ext cx="903176" cy="0"/>
           </a:xfrm>
           <a:prstGeom prst="line">
@@ -10096,7 +10096,7 @@
         </p:nvCxnSpPr>
         <p:spPr>
           <a:xfrm flipH="1" flipV="1">
-            <a:off x="27126782" y="8797167"/>
+            <a:off x="27126782" y="5084007"/>
             <a:ext cx="577846" cy="16033"/>
           </a:xfrm>
           <a:prstGeom prst="straightConnector1">
@@ -10138,7 +10138,7 @@
         </p:nvSpPr>
         <p:spPr>
           <a:xfrm>
-            <a:off x="30492037" y="8642374"/>
+            <a:off x="30492037" y="4929212"/>
             <a:ext cx="355688" cy="355688"/>
           </a:xfrm>
           <a:prstGeom prst="ellipse">
@@ -10193,7 +10193,7 @@
         </p:nvSpPr>
         <p:spPr>
           <a:xfrm>
-            <a:off x="26760729" y="8642374"/>
+            <a:off x="26760729" y="4929212"/>
             <a:ext cx="355688" cy="355688"/>
           </a:xfrm>
           <a:prstGeom prst="ellipse">
@@ -10243,7 +10243,7 @@
         </p:nvSpPr>
         <p:spPr>
           <a:xfrm>
-            <a:off x="25918350" y="8274906"/>
+            <a:off x="25918350" y="4561744"/>
             <a:ext cx="739298" cy="739298"/>
           </a:xfrm>
           <a:prstGeom prst="ellipse">
@@ -10300,7 +10300,7 @@
         </p:nvCxnSpPr>
         <p:spPr>
           <a:xfrm>
-            <a:off x="25886246" y="13141440"/>
+            <a:off x="25886248" y="9428278"/>
             <a:ext cx="5601691" cy="0"/>
           </a:xfrm>
           <a:prstGeom prst="line">
@@ -10336,7 +10336,7 @@
         </p:nvSpPr>
         <p:spPr>
           <a:xfrm>
-            <a:off x="27668717" y="11954601"/>
+            <a:off x="27668719" y="8241441"/>
             <a:ext cx="1786965" cy="985829"/>
           </a:xfrm>
           <a:custGeom>
@@ -10423,7 +10423,7 @@
         </p:nvCxnSpPr>
         <p:spPr>
           <a:xfrm>
-            <a:off x="29455668" y="12924390"/>
+            <a:off x="29455668" y="9211228"/>
             <a:ext cx="903176" cy="0"/>
           </a:xfrm>
           <a:prstGeom prst="line">
@@ -10467,7 +10467,7 @@
         </p:nvCxnSpPr>
         <p:spPr>
           <a:xfrm flipH="1" flipV="1">
-            <a:off x="27090862" y="12924409"/>
+            <a:off x="27090862" y="9211249"/>
             <a:ext cx="577846" cy="16033"/>
           </a:xfrm>
           <a:prstGeom prst="straightConnector1">
@@ -10509,7 +10509,7 @@
         </p:nvSpPr>
         <p:spPr>
           <a:xfrm>
-            <a:off x="30456117" y="12769616"/>
+            <a:off x="30456117" y="9056454"/>
             <a:ext cx="355688" cy="355688"/>
           </a:xfrm>
           <a:prstGeom prst="ellipse">
@@ -10564,7 +10564,7 @@
         </p:nvSpPr>
         <p:spPr>
           <a:xfrm>
-            <a:off x="26724809" y="12769609"/>
+            <a:off x="26724809" y="9056447"/>
             <a:ext cx="355688" cy="355688"/>
           </a:xfrm>
           <a:prstGeom prst="ellipse">
@@ -10614,7 +10614,7 @@
         </p:nvSpPr>
         <p:spPr>
           <a:xfrm>
-            <a:off x="25882437" y="12402149"/>
+            <a:off x="25882437" y="8688987"/>
             <a:ext cx="739298" cy="739298"/>
           </a:xfrm>
           <a:prstGeom prst="ellipse">
@@ -10669,7 +10669,7 @@
         </p:nvSpPr>
         <p:spPr>
           <a:xfrm>
-            <a:off x="27941061" y="8032282"/>
+            <a:off x="27941061" y="4319122"/>
             <a:ext cx="1338190" cy="985829"/>
           </a:xfrm>
           <a:prstGeom prst="rect">
@@ -10727,7 +10727,7 @@
         </p:nvSpPr>
         <p:spPr>
           <a:xfrm>
-            <a:off x="24598962" y="4026472"/>
+            <a:off x="24598962" y="313310"/>
             <a:ext cx="6657592" cy="707886"/>
           </a:xfrm>
           <a:prstGeom prst="rect">
@@ -10767,7 +10767,7 @@
         </p:nvCxnSpPr>
         <p:spPr>
           <a:xfrm>
-            <a:off x="25879619" y="11288789"/>
+            <a:off x="25879621" y="7575627"/>
             <a:ext cx="5601691" cy="0"/>
           </a:xfrm>
           <a:prstGeom prst="line">
@@ -10803,7 +10803,7 @@
         </p:nvSpPr>
         <p:spPr>
           <a:xfrm>
-            <a:off x="27662089" y="10101950"/>
+            <a:off x="27662091" y="6388790"/>
             <a:ext cx="1786965" cy="985829"/>
           </a:xfrm>
           <a:custGeom>
@@ -10890,7 +10890,7 @@
         </p:nvCxnSpPr>
         <p:spPr>
           <a:xfrm>
-            <a:off x="29449040" y="11071739"/>
+            <a:off x="29449040" y="7358577"/>
             <a:ext cx="903176" cy="0"/>
           </a:xfrm>
           <a:prstGeom prst="line">
@@ -10934,7 +10934,7 @@
         </p:nvCxnSpPr>
         <p:spPr>
           <a:xfrm flipH="1" flipV="1">
-            <a:off x="27084235" y="11071759"/>
+            <a:off x="27084235" y="7358599"/>
             <a:ext cx="577846" cy="16033"/>
           </a:xfrm>
           <a:prstGeom prst="straightConnector1">
@@ -10976,7 +10976,7 @@
         </p:nvSpPr>
         <p:spPr>
           <a:xfrm>
-            <a:off x="30449490" y="10916958"/>
+            <a:off x="30449490" y="7203796"/>
             <a:ext cx="355688" cy="355688"/>
           </a:xfrm>
           <a:prstGeom prst="ellipse">
@@ -11031,7 +11031,7 @@
         </p:nvSpPr>
         <p:spPr>
           <a:xfrm>
-            <a:off x="26718183" y="10916958"/>
+            <a:off x="26718183" y="7203796"/>
             <a:ext cx="355688" cy="355688"/>
           </a:xfrm>
           <a:prstGeom prst="ellipse">
@@ -11081,7 +11081,7 @@
         </p:nvSpPr>
         <p:spPr>
           <a:xfrm>
-            <a:off x="25875810" y="10549498"/>
+            <a:off x="25875810" y="6836336"/>
             <a:ext cx="739298" cy="739298"/>
           </a:xfrm>
           <a:prstGeom prst="ellipse">
@@ -11136,7 +11136,7 @@
         </p:nvSpPr>
         <p:spPr>
           <a:xfrm>
-            <a:off x="28381026" y="10348470"/>
+            <a:off x="28381028" y="6635310"/>
             <a:ext cx="370541" cy="940335"/>
           </a:xfrm>
           <a:prstGeom prst="rect">
@@ -11184,7 +11184,7 @@
         </p:nvCxnSpPr>
         <p:spPr>
           <a:xfrm>
-            <a:off x="32682284" y="7273659"/>
+            <a:off x="32682286" y="3560497"/>
             <a:ext cx="6800531" cy="0"/>
           </a:xfrm>
           <a:prstGeom prst="line">
@@ -11220,7 +11220,7 @@
         </p:nvSpPr>
         <p:spPr>
           <a:xfrm>
-            <a:off x="36383110" y="6317404"/>
+            <a:off x="36383112" y="2604244"/>
             <a:ext cx="370541" cy="940335"/>
           </a:xfrm>
           <a:prstGeom prst="rect">
@@ -11266,7 +11266,7 @@
         </p:nvSpPr>
         <p:spPr>
           <a:xfrm>
-            <a:off x="38551190" y="7093184"/>
+            <a:off x="38551190" y="3380022"/>
             <a:ext cx="168298" cy="168298"/>
           </a:xfrm>
           <a:prstGeom prst="ellipse">
@@ -11312,7 +11312,7 @@
         </p:nvSpPr>
         <p:spPr>
           <a:xfrm>
-            <a:off x="32739869" y="6795142"/>
+            <a:off x="32739869" y="3081980"/>
             <a:ext cx="464094" cy="464094"/>
           </a:xfrm>
           <a:prstGeom prst="ellipse">
@@ -11358,7 +11358,7 @@
         </p:nvSpPr>
         <p:spPr>
           <a:xfrm>
-            <a:off x="38450998" y="6901827"/>
+            <a:off x="38450998" y="3188665"/>
             <a:ext cx="355688" cy="355688"/>
           </a:xfrm>
           <a:prstGeom prst="ellipse">
@@ -11410,7 +11410,7 @@
         </p:nvCxnSpPr>
         <p:spPr>
           <a:xfrm flipV="1">
-            <a:off x="38619292" y="6905801"/>
+            <a:off x="38619292" y="3192639"/>
             <a:ext cx="0" cy="178778"/>
           </a:xfrm>
           <a:prstGeom prst="straightConnector1">
@@ -11455,7 +11455,7 @@
         </p:nvCxnSpPr>
         <p:spPr>
           <a:xfrm flipH="1" flipV="1">
-            <a:off x="38460960" y="7005845"/>
+            <a:off x="38460962" y="3292685"/>
             <a:ext cx="136339" cy="106059"/>
           </a:xfrm>
           <a:prstGeom prst="straightConnector1">
@@ -11500,7 +11500,7 @@
         </p:nvCxnSpPr>
         <p:spPr>
           <a:xfrm flipV="1">
-            <a:off x="38693418" y="6955990"/>
+            <a:off x="38693418" y="3242828"/>
             <a:ext cx="61146" cy="167992"/>
           </a:xfrm>
           <a:prstGeom prst="straightConnector1">
@@ -11543,7 +11543,7 @@
         </p:nvSpPr>
         <p:spPr>
           <a:xfrm>
-            <a:off x="32601965" y="6534362"/>
+            <a:off x="32601965" y="2821200"/>
             <a:ext cx="739298" cy="739298"/>
           </a:xfrm>
           <a:prstGeom prst="ellipse">
@@ -11595,7 +11595,7 @@
         </p:nvCxnSpPr>
         <p:spPr>
           <a:xfrm flipH="1" flipV="1">
-            <a:off x="32955712" y="6550269"/>
+            <a:off x="32955712" y="2837109"/>
             <a:ext cx="4420" cy="233997"/>
           </a:xfrm>
           <a:prstGeom prst="straightConnector1">
@@ -11640,7 +11640,7 @@
         </p:nvCxnSpPr>
         <p:spPr>
           <a:xfrm flipV="1">
-            <a:off x="33131541" y="6707402"/>
+            <a:off x="33131541" y="2994240"/>
             <a:ext cx="148836" cy="130658"/>
           </a:xfrm>
           <a:prstGeom prst="straightConnector1">
@@ -11685,7 +11685,7 @@
         </p:nvCxnSpPr>
         <p:spPr>
           <a:xfrm flipH="1" flipV="1">
-            <a:off x="32662591" y="6718759"/>
+            <a:off x="32662591" y="3005599"/>
             <a:ext cx="154518" cy="123885"/>
           </a:xfrm>
           <a:prstGeom prst="straightConnector1">
@@ -11730,7 +11730,7 @@
         </p:nvCxnSpPr>
         <p:spPr>
           <a:xfrm>
-            <a:off x="32625458" y="9075116"/>
+            <a:off x="32625460" y="5361954"/>
             <a:ext cx="6853563" cy="0"/>
           </a:xfrm>
           <a:prstGeom prst="line">
@@ -11766,7 +11766,7 @@
         </p:nvSpPr>
         <p:spPr>
           <a:xfrm>
-            <a:off x="36379303" y="8118862"/>
+            <a:off x="36379305" y="4405702"/>
             <a:ext cx="370541" cy="940335"/>
           </a:xfrm>
           <a:prstGeom prst="rect">
@@ -11812,7 +11812,7 @@
         </p:nvSpPr>
         <p:spPr>
           <a:xfrm>
-            <a:off x="35659788" y="7888275"/>
+            <a:off x="35659790" y="4175115"/>
             <a:ext cx="1786965" cy="985829"/>
           </a:xfrm>
           <a:custGeom>
@@ -11899,7 +11899,7 @@
         </p:nvCxnSpPr>
         <p:spPr>
           <a:xfrm>
-            <a:off x="37446740" y="8858066"/>
+            <a:off x="37446740" y="5144904"/>
             <a:ext cx="903176" cy="0"/>
           </a:xfrm>
           <a:prstGeom prst="line">
@@ -11943,7 +11943,7 @@
         </p:nvCxnSpPr>
         <p:spPr>
           <a:xfrm flipH="1" flipV="1">
-            <a:off x="35081935" y="8858086"/>
+            <a:off x="35081935" y="5144926"/>
             <a:ext cx="577846" cy="16033"/>
           </a:xfrm>
           <a:prstGeom prst="straightConnector1">
@@ -11985,7 +11985,7 @@
         </p:nvSpPr>
         <p:spPr>
           <a:xfrm>
-            <a:off x="38447190" y="8703291"/>
+            <a:off x="38447190" y="4990129"/>
             <a:ext cx="355688" cy="355688"/>
           </a:xfrm>
           <a:prstGeom prst="ellipse">
@@ -12040,7 +12040,7 @@
         </p:nvSpPr>
         <p:spPr>
           <a:xfrm>
-            <a:off x="34715882" y="8703284"/>
+            <a:off x="34715882" y="4990122"/>
             <a:ext cx="355688" cy="355688"/>
           </a:xfrm>
           <a:prstGeom prst="ellipse">
@@ -12090,7 +12090,7 @@
         </p:nvSpPr>
         <p:spPr>
           <a:xfrm>
-            <a:off x="32658318" y="8335825"/>
+            <a:off x="32658318" y="4622663"/>
             <a:ext cx="739298" cy="739298"/>
           </a:xfrm>
           <a:prstGeom prst="ellipse">
@@ -12145,7 +12145,7 @@
         </p:nvSpPr>
         <p:spPr>
           <a:xfrm>
-            <a:off x="32614908" y="8657430"/>
+            <a:off x="32614908" y="4944268"/>
             <a:ext cx="2858698" cy="401982"/>
           </a:xfrm>
           <a:prstGeom prst="rect">
@@ -12205,7 +12205,7 @@
         </p:nvCxnSpPr>
         <p:spPr>
           <a:xfrm>
-            <a:off x="32465041" y="11334649"/>
+            <a:off x="32465043" y="7621487"/>
             <a:ext cx="6853563" cy="0"/>
           </a:xfrm>
           <a:prstGeom prst="line">
@@ -12241,7 +12241,7 @@
         </p:nvSpPr>
         <p:spPr>
           <a:xfrm>
-            <a:off x="38286774" y="10962816"/>
+            <a:off x="38286774" y="7249654"/>
             <a:ext cx="355688" cy="355688"/>
           </a:xfrm>
           <a:prstGeom prst="ellipse">
@@ -12296,7 +12296,7 @@
         </p:nvSpPr>
         <p:spPr>
           <a:xfrm>
-            <a:off x="33292148" y="10962816"/>
+            <a:off x="33292148" y="7249654"/>
             <a:ext cx="355688" cy="355688"/>
           </a:xfrm>
           <a:prstGeom prst="ellipse">
@@ -12346,7 +12346,7 @@
         </p:nvSpPr>
         <p:spPr>
           <a:xfrm>
-            <a:off x="32497894" y="10595359"/>
+            <a:off x="32497894" y="6882197"/>
             <a:ext cx="739298" cy="739298"/>
           </a:xfrm>
           <a:prstGeom prst="ellipse">
@@ -12403,7 +12403,7 @@
         </p:nvCxnSpPr>
         <p:spPr>
           <a:xfrm flipH="1">
-            <a:off x="33800347" y="11110958"/>
+            <a:off x="33800349" y="7397796"/>
             <a:ext cx="4211935" cy="0"/>
           </a:xfrm>
           <a:prstGeom prst="straightConnector1">
@@ -12444,7 +12444,7 @@
         </p:nvCxnSpPr>
         <p:spPr>
           <a:xfrm>
-            <a:off x="32408202" y="13189613"/>
+            <a:off x="32408204" y="9476451"/>
             <a:ext cx="6853563" cy="0"/>
           </a:xfrm>
           <a:prstGeom prst="line">
@@ -12480,7 +12480,7 @@
         </p:nvSpPr>
         <p:spPr>
           <a:xfrm>
-            <a:off x="38229933" y="12817789"/>
+            <a:off x="38229933" y="9104627"/>
             <a:ext cx="355688" cy="355688"/>
           </a:xfrm>
           <a:prstGeom prst="ellipse">
@@ -12535,7 +12535,7 @@
         </p:nvSpPr>
         <p:spPr>
           <a:xfrm>
-            <a:off x="34775356" y="12817789"/>
+            <a:off x="34775356" y="9104627"/>
             <a:ext cx="355688" cy="355688"/>
           </a:xfrm>
           <a:prstGeom prst="ellipse">
@@ -12585,7 +12585,7 @@
         </p:nvSpPr>
         <p:spPr>
           <a:xfrm>
-            <a:off x="32441061" y="12450323"/>
+            <a:off x="32441061" y="8737161"/>
             <a:ext cx="739298" cy="739298"/>
           </a:xfrm>
           <a:prstGeom prst="ellipse">
@@ -12642,7 +12642,7 @@
         </p:nvCxnSpPr>
         <p:spPr>
           <a:xfrm flipH="1">
-            <a:off x="35208925" y="12965922"/>
+            <a:off x="35208925" y="9252760"/>
             <a:ext cx="2746520" cy="0"/>
           </a:xfrm>
           <a:prstGeom prst="straightConnector1">
@@ -12681,7 +12681,7 @@
         </p:nvSpPr>
         <p:spPr>
           <a:xfrm>
-            <a:off x="32102663" y="4026472"/>
+            <a:off x="32102663" y="313310"/>
             <a:ext cx="5516254" cy="707886"/>
           </a:xfrm>
           <a:prstGeom prst="rect">
@@ -12719,7 +12719,7 @@
         </p:nvSpPr>
         <p:spPr>
           <a:xfrm>
-            <a:off x="25266352" y="2633740"/>
+            <a:off x="25266354" y="-1079422"/>
             <a:ext cx="13012473" cy="1323439"/>
           </a:xfrm>
           <a:prstGeom prst="rect">
@@ -12770,7 +12770,7 @@
         </p:nvCxnSpPr>
         <p:spPr>
           <a:xfrm>
-            <a:off x="4852868" y="13222873"/>
+            <a:off x="4852870" y="9509711"/>
             <a:ext cx="5601691" cy="0"/>
           </a:xfrm>
           <a:prstGeom prst="line">
@@ -12806,7 +12806,7 @@
         </p:nvSpPr>
         <p:spPr>
           <a:xfrm>
-            <a:off x="6635341" y="12036034"/>
+            <a:off x="6635343" y="8322874"/>
             <a:ext cx="1786965" cy="985829"/>
           </a:xfrm>
           <a:custGeom>
@@ -12893,7 +12893,7 @@
         </p:nvCxnSpPr>
         <p:spPr>
           <a:xfrm>
-            <a:off x="8422292" y="13005822"/>
+            <a:off x="8422292" y="9292660"/>
             <a:ext cx="903176" cy="0"/>
           </a:xfrm>
           <a:prstGeom prst="line">
@@ -12936,7 +12936,7 @@
         </p:nvCxnSpPr>
         <p:spPr>
           <a:xfrm>
-            <a:off x="8721174" y="12910663"/>
+            <a:off x="8721176" y="9197501"/>
             <a:ext cx="508887" cy="0"/>
           </a:xfrm>
           <a:prstGeom prst="straightConnector1">
@@ -12981,7 +12981,7 @@
         </p:nvCxnSpPr>
         <p:spPr>
           <a:xfrm rot="10800000">
-            <a:off x="8721174" y="13087668"/>
+            <a:off x="8721176" y="9374506"/>
             <a:ext cx="508887" cy="0"/>
           </a:xfrm>
           <a:prstGeom prst="straightConnector1">
@@ -13027,7 +13027,7 @@
         </p:nvCxnSpPr>
         <p:spPr>
           <a:xfrm flipH="1" flipV="1">
-            <a:off x="6057486" y="13005843"/>
+            <a:off x="6057486" y="9292683"/>
             <a:ext cx="577846" cy="16033"/>
           </a:xfrm>
           <a:prstGeom prst="straightConnector1">
@@ -13069,7 +13069,7 @@
         </p:nvSpPr>
         <p:spPr>
           <a:xfrm>
-            <a:off x="9422741" y="12851040"/>
+            <a:off x="9422741" y="9137878"/>
             <a:ext cx="355688" cy="355688"/>
           </a:xfrm>
           <a:prstGeom prst="ellipse">
@@ -13124,7 +13124,7 @@
         </p:nvSpPr>
         <p:spPr>
           <a:xfrm>
-            <a:off x="5691433" y="12851040"/>
+            <a:off x="5691433" y="9137878"/>
             <a:ext cx="355688" cy="355688"/>
           </a:xfrm>
           <a:prstGeom prst="ellipse">
@@ -13174,7 +13174,7 @@
         </p:nvSpPr>
         <p:spPr>
           <a:xfrm>
-            <a:off x="4849061" y="12483575"/>
+            <a:off x="4849061" y="8770413"/>
             <a:ext cx="739298" cy="739298"/>
           </a:xfrm>
           <a:prstGeom prst="ellipse">
@@ -13231,7 +13231,7 @@
         </p:nvCxnSpPr>
         <p:spPr>
           <a:xfrm>
-            <a:off x="4852868" y="11232704"/>
+            <a:off x="4852870" y="7519542"/>
             <a:ext cx="5601691" cy="0"/>
           </a:xfrm>
           <a:prstGeom prst="line">
@@ -13267,7 +13267,7 @@
         </p:nvSpPr>
         <p:spPr>
           <a:xfrm>
-            <a:off x="9422741" y="10860872"/>
+            <a:off x="9422741" y="7147710"/>
             <a:ext cx="355688" cy="355688"/>
           </a:xfrm>
           <a:prstGeom prst="ellipse">
@@ -13322,7 +13322,7 @@
         </p:nvSpPr>
         <p:spPr>
           <a:xfrm>
-            <a:off x="5691433" y="10860872"/>
+            <a:off x="5691433" y="7147710"/>
             <a:ext cx="355688" cy="355688"/>
           </a:xfrm>
           <a:prstGeom prst="ellipse">
@@ -13372,7 +13372,7 @@
         </p:nvSpPr>
         <p:spPr>
           <a:xfrm>
-            <a:off x="4849061" y="10493413"/>
+            <a:off x="4849061" y="6780251"/>
             <a:ext cx="739298" cy="739298"/>
           </a:xfrm>
           <a:prstGeom prst="ellipse">
@@ -13429,7 +13429,7 @@
         </p:nvCxnSpPr>
         <p:spPr>
           <a:xfrm flipH="1">
-            <a:off x="6170111" y="11038708"/>
+            <a:off x="6170113" y="7325546"/>
             <a:ext cx="3143621" cy="0"/>
           </a:xfrm>
           <a:prstGeom prst="straightConnector1">
@@ -13470,7 +13470,7 @@
         </p:nvCxnSpPr>
         <p:spPr>
           <a:xfrm>
-            <a:off x="17729630" y="13529144"/>
+            <a:off x="17729632" y="9815982"/>
             <a:ext cx="5601691" cy="0"/>
           </a:xfrm>
           <a:prstGeom prst="line">
@@ -13506,7 +13506,7 @@
         </p:nvSpPr>
         <p:spPr>
           <a:xfrm>
-            <a:off x="19512100" y="12342305"/>
+            <a:off x="19512102" y="8629145"/>
             <a:ext cx="1786965" cy="985829"/>
           </a:xfrm>
           <a:custGeom>
@@ -13593,7 +13593,7 @@
         </p:nvCxnSpPr>
         <p:spPr>
           <a:xfrm>
-            <a:off x="21299051" y="13312094"/>
+            <a:off x="21299051" y="9598932"/>
             <a:ext cx="903176" cy="0"/>
           </a:xfrm>
           <a:prstGeom prst="line">
@@ -13636,7 +13636,7 @@
         </p:nvCxnSpPr>
         <p:spPr>
           <a:xfrm>
-            <a:off x="21597934" y="13216935"/>
+            <a:off x="21597936" y="9503773"/>
             <a:ext cx="508887" cy="0"/>
           </a:xfrm>
           <a:prstGeom prst="straightConnector1">
@@ -13681,7 +13681,7 @@
         </p:nvCxnSpPr>
         <p:spPr>
           <a:xfrm rot="10800000">
-            <a:off x="21597934" y="13393937"/>
+            <a:off x="21597936" y="9680775"/>
             <a:ext cx="508887" cy="0"/>
           </a:xfrm>
           <a:prstGeom prst="straightConnector1">
@@ -13727,7 +13727,7 @@
         </p:nvCxnSpPr>
         <p:spPr>
           <a:xfrm flipH="1" flipV="1">
-            <a:off x="18934245" y="13312114"/>
+            <a:off x="18934245" y="9598954"/>
             <a:ext cx="577846" cy="16033"/>
           </a:xfrm>
           <a:prstGeom prst="straightConnector1">
@@ -13769,7 +13769,7 @@
         </p:nvSpPr>
         <p:spPr>
           <a:xfrm>
-            <a:off x="22299500" y="13157312"/>
+            <a:off x="22299500" y="9444150"/>
             <a:ext cx="355688" cy="355688"/>
           </a:xfrm>
           <a:prstGeom prst="ellipse">
@@ -13824,7 +13824,7 @@
         </p:nvSpPr>
         <p:spPr>
           <a:xfrm>
-            <a:off x="18568195" y="13157312"/>
+            <a:off x="18568195" y="9444150"/>
             <a:ext cx="355688" cy="355688"/>
           </a:xfrm>
           <a:prstGeom prst="ellipse">
@@ -13874,7 +13874,7 @@
         </p:nvSpPr>
         <p:spPr>
           <a:xfrm>
-            <a:off x="17725821" y="12789847"/>
+            <a:off x="17725821" y="9076685"/>
             <a:ext cx="739298" cy="739298"/>
           </a:xfrm>
           <a:prstGeom prst="ellipse">
@@ -13931,7 +13931,7 @@
         </p:nvCxnSpPr>
         <p:spPr>
           <a:xfrm>
-            <a:off x="17729630" y="11538976"/>
+            <a:off x="17729632" y="7825814"/>
             <a:ext cx="5601691" cy="0"/>
           </a:xfrm>
           <a:prstGeom prst="line">
@@ -13967,7 +13967,7 @@
         </p:nvSpPr>
         <p:spPr>
           <a:xfrm>
-            <a:off x="22299500" y="11167144"/>
+            <a:off x="22299500" y="7453982"/>
             <a:ext cx="355688" cy="355688"/>
           </a:xfrm>
           <a:prstGeom prst="ellipse">
@@ -14022,7 +14022,7 @@
         </p:nvSpPr>
         <p:spPr>
           <a:xfrm>
-            <a:off x="18568195" y="11167144"/>
+            <a:off x="18568195" y="7453982"/>
             <a:ext cx="355688" cy="355688"/>
           </a:xfrm>
           <a:prstGeom prst="ellipse">
@@ -14072,7 +14072,7 @@
         </p:nvSpPr>
         <p:spPr>
           <a:xfrm>
-            <a:off x="17725821" y="10799684"/>
+            <a:off x="17725821" y="7086522"/>
             <a:ext cx="739298" cy="739298"/>
           </a:xfrm>
           <a:prstGeom prst="ellipse">
@@ -14129,7 +14129,7 @@
         </p:nvCxnSpPr>
         <p:spPr>
           <a:xfrm flipH="1">
-            <a:off x="19046872" y="11344978"/>
+            <a:off x="19046874" y="7631816"/>
             <a:ext cx="3143621" cy="0"/>
           </a:xfrm>
           <a:prstGeom prst="straightConnector1">
@@ -14182,7 +14182,7 @@
         </p:blipFill>
         <p:spPr>
           <a:xfrm>
-            <a:off x="-872365" y="14276369"/>
+            <a:off x="-872365" y="10563207"/>
             <a:ext cx="5316904" cy="5316904"/>
           </a:xfrm>
           <a:prstGeom prst="rect">
@@ -14218,7 +14218,7 @@
         </p:blipFill>
         <p:spPr>
           <a:xfrm>
-            <a:off x="5178967" y="14206382"/>
+            <a:off x="5178969" y="10493222"/>
             <a:ext cx="5349427" cy="5349427"/>
           </a:xfrm>
           <a:prstGeom prst="rect">
@@ -14254,7 +14254,7 @@
         </p:blipFill>
         <p:spPr>
           <a:xfrm>
-            <a:off x="11486250" y="14289333"/>
+            <a:off x="11486250" y="10576171"/>
             <a:ext cx="5316904" cy="5316904"/>
           </a:xfrm>
           <a:prstGeom prst="rect">
@@ -14290,7 +14290,7 @@
         </p:blipFill>
         <p:spPr>
           <a:xfrm>
-            <a:off x="17537586" y="14219345"/>
+            <a:off x="17537588" y="10506185"/>
             <a:ext cx="5349427" cy="5349427"/>
           </a:xfrm>
           <a:prstGeom prst="rect">
@@ -14326,7 +14326,7 @@
         </p:blipFill>
         <p:spPr>
           <a:xfrm>
-            <a:off x="25047036" y="14074961"/>
+            <a:off x="25047036" y="10361799"/>
             <a:ext cx="5349246" cy="5349246"/>
           </a:xfrm>
           <a:prstGeom prst="rect">
@@ -14362,7 +14362,7 @@
         </p:blipFill>
         <p:spPr>
           <a:xfrm>
-            <a:off x="33452307" y="14056113"/>
+            <a:off x="33452307" y="10342951"/>
             <a:ext cx="5309426" cy="5309426"/>
           </a:xfrm>
           <a:prstGeom prst="rect">
@@ -14420,7 +14420,7 @@
         </p:nvSpPr>
         <p:spPr>
           <a:xfrm>
-            <a:off x="29074702" y="4027014"/>
+            <a:off x="29074704" y="3793654"/>
             <a:ext cx="7938917" cy="10205209"/>
           </a:xfrm>
           <a:prstGeom prst="rect">
@@ -14474,7 +14474,7 @@
         </p:nvSpPr>
         <p:spPr>
           <a:xfrm>
-            <a:off x="21735517" y="4027012"/>
+            <a:off x="21735517" y="3793652"/>
             <a:ext cx="7365600" cy="10205209"/>
           </a:xfrm>
           <a:prstGeom prst="rect">
@@ -14528,7 +14528,7 @@
         </p:nvSpPr>
         <p:spPr>
           <a:xfrm>
-            <a:off x="8408286" y="4027016"/>
+            <a:off x="8408288" y="3793656"/>
             <a:ext cx="7938917" cy="10205209"/>
           </a:xfrm>
           <a:prstGeom prst="rect">
@@ -14582,7 +14582,7 @@
         </p:nvSpPr>
         <p:spPr>
           <a:xfrm>
-            <a:off x="1069101" y="4027014"/>
+            <a:off x="1069101" y="3793654"/>
             <a:ext cx="7365600" cy="10205209"/>
           </a:xfrm>
           <a:prstGeom prst="rect">
@@ -14638,7 +14638,7 @@
         </p:nvCxnSpPr>
         <p:spPr>
           <a:xfrm>
-            <a:off x="9790102" y="6425241"/>
+            <a:off x="9790104" y="6191879"/>
             <a:ext cx="5601691" cy="0"/>
           </a:xfrm>
           <a:prstGeom prst="line">
@@ -14674,7 +14674,7 @@
         </p:nvSpPr>
         <p:spPr>
           <a:xfrm>
-            <a:off x="14907711" y="6495349"/>
+            <a:off x="14907713" y="6261989"/>
             <a:ext cx="370541" cy="940335"/>
           </a:xfrm>
           <a:prstGeom prst="rect">
@@ -14722,7 +14722,7 @@
         </p:nvCxnSpPr>
         <p:spPr>
           <a:xfrm>
-            <a:off x="13654609" y="6208183"/>
+            <a:off x="13654609" y="5974821"/>
             <a:ext cx="608106" cy="0"/>
           </a:xfrm>
           <a:prstGeom prst="line">
@@ -14764,7 +14764,7 @@
         </p:nvSpPr>
         <p:spPr>
           <a:xfrm>
-            <a:off x="13172154" y="6053410"/>
+            <a:off x="13172154" y="5820048"/>
             <a:ext cx="355688" cy="355688"/>
           </a:xfrm>
           <a:prstGeom prst="ellipse">
@@ -14816,7 +14816,7 @@
         </p:nvCxnSpPr>
         <p:spPr>
           <a:xfrm>
-            <a:off x="9786297" y="8226699"/>
+            <a:off x="9786299" y="7993337"/>
             <a:ext cx="5601691" cy="0"/>
           </a:xfrm>
           <a:prstGeom prst="line">
@@ -14852,7 +14852,7 @@
         </p:nvSpPr>
         <p:spPr>
           <a:xfrm>
-            <a:off x="14903904" y="7270446"/>
+            <a:off x="14903906" y="7037086"/>
             <a:ext cx="370541" cy="940335"/>
           </a:xfrm>
           <a:prstGeom prst="rect">
@@ -14898,7 +14898,7 @@
         </p:nvSpPr>
         <p:spPr>
           <a:xfrm>
-            <a:off x="11568772" y="7039859"/>
+            <a:off x="11568774" y="6806499"/>
             <a:ext cx="1786965" cy="985829"/>
           </a:xfrm>
           <a:custGeom>
@@ -14985,7 +14985,7 @@
         </p:nvCxnSpPr>
         <p:spPr>
           <a:xfrm>
-            <a:off x="13355723" y="8009647"/>
+            <a:off x="13355723" y="7776285"/>
             <a:ext cx="903176" cy="0"/>
           </a:xfrm>
           <a:prstGeom prst="line">
@@ -15029,7 +15029,7 @@
         </p:nvCxnSpPr>
         <p:spPr>
           <a:xfrm flipH="1" flipV="1">
-            <a:off x="10990918" y="8009668"/>
+            <a:off x="10990918" y="7776308"/>
             <a:ext cx="577846" cy="16033"/>
           </a:xfrm>
           <a:prstGeom prst="straightConnector1">
@@ -15071,7 +15071,7 @@
         </p:nvSpPr>
         <p:spPr>
           <a:xfrm>
-            <a:off x="14356167" y="7854867"/>
+            <a:off x="14356167" y="7621505"/>
             <a:ext cx="355688" cy="355688"/>
           </a:xfrm>
           <a:prstGeom prst="ellipse">
@@ -15126,7 +15126,7 @@
         </p:nvSpPr>
         <p:spPr>
           <a:xfrm>
-            <a:off x="13168349" y="7854867"/>
+            <a:off x="13168349" y="7621505"/>
             <a:ext cx="355688" cy="355688"/>
           </a:xfrm>
           <a:prstGeom prst="ellipse">
@@ -15176,7 +15176,7 @@
         </p:nvSpPr>
         <p:spPr>
           <a:xfrm>
-            <a:off x="10624865" y="7854867"/>
+            <a:off x="10624865" y="7621505"/>
             <a:ext cx="355688" cy="355688"/>
           </a:xfrm>
           <a:prstGeom prst="ellipse">
@@ -15226,7 +15226,7 @@
         </p:nvSpPr>
         <p:spPr>
           <a:xfrm>
-            <a:off x="9782487" y="7487409"/>
+            <a:off x="9782487" y="7254047"/>
             <a:ext cx="739298" cy="739298"/>
           </a:xfrm>
           <a:prstGeom prst="ellipse">
@@ -15283,7 +15283,7 @@
         </p:nvCxnSpPr>
         <p:spPr>
           <a:xfrm>
-            <a:off x="1901282" y="6406572"/>
+            <a:off x="1901284" y="6173210"/>
             <a:ext cx="5601691" cy="0"/>
           </a:xfrm>
           <a:prstGeom prst="line">
@@ -15319,7 +15319,7 @@
         </p:nvSpPr>
         <p:spPr>
           <a:xfrm>
-            <a:off x="4403265" y="5450316"/>
+            <a:off x="4403267" y="5216956"/>
             <a:ext cx="370541" cy="940335"/>
           </a:xfrm>
           <a:prstGeom prst="rect">
@@ -15367,7 +15367,7 @@
         </p:nvCxnSpPr>
         <p:spPr>
           <a:xfrm>
-            <a:off x="5765787" y="6189514"/>
+            <a:off x="5765787" y="5956152"/>
             <a:ext cx="608106" cy="0"/>
           </a:xfrm>
           <a:prstGeom prst="line">
@@ -15409,7 +15409,7 @@
         </p:nvSpPr>
         <p:spPr>
           <a:xfrm>
-            <a:off x="5283340" y="6034741"/>
+            <a:off x="5283340" y="5801379"/>
             <a:ext cx="355688" cy="355688"/>
           </a:xfrm>
           <a:prstGeom prst="ellipse">
@@ -15461,7 +15461,7 @@
         </p:nvCxnSpPr>
         <p:spPr>
           <a:xfrm>
-            <a:off x="1897477" y="8208030"/>
+            <a:off x="1897479" y="7974668"/>
             <a:ext cx="5601691" cy="0"/>
           </a:xfrm>
           <a:prstGeom prst="line">
@@ -15497,7 +15497,7 @@
         </p:nvSpPr>
         <p:spPr>
           <a:xfrm>
-            <a:off x="4399465" y="7251775"/>
+            <a:off x="4399467" y="7018415"/>
             <a:ext cx="370541" cy="940335"/>
           </a:xfrm>
           <a:prstGeom prst="rect">
@@ -15543,7 +15543,7 @@
         </p:nvSpPr>
         <p:spPr>
           <a:xfrm>
-            <a:off x="3679947" y="7021186"/>
+            <a:off x="3679949" y="6787826"/>
             <a:ext cx="1786965" cy="985829"/>
           </a:xfrm>
           <a:custGeom>
@@ -15630,7 +15630,7 @@
         </p:nvCxnSpPr>
         <p:spPr>
           <a:xfrm>
-            <a:off x="5466902" y="7990978"/>
+            <a:off x="5466902" y="7757616"/>
             <a:ext cx="903176" cy="0"/>
           </a:xfrm>
           <a:prstGeom prst="line">
@@ -15674,7 +15674,7 @@
         </p:nvCxnSpPr>
         <p:spPr>
           <a:xfrm flipH="1" flipV="1">
-            <a:off x="3102097" y="7990995"/>
+            <a:off x="3102097" y="7757635"/>
             <a:ext cx="577846" cy="16033"/>
           </a:xfrm>
           <a:prstGeom prst="straightConnector1">
@@ -15716,7 +15716,7 @@
         </p:nvSpPr>
         <p:spPr>
           <a:xfrm>
-            <a:off x="6467353" y="7836198"/>
+            <a:off x="6467353" y="7602836"/>
             <a:ext cx="355688" cy="355688"/>
           </a:xfrm>
           <a:prstGeom prst="ellipse">
@@ -15771,7 +15771,7 @@
         </p:nvSpPr>
         <p:spPr>
           <a:xfrm>
-            <a:off x="5279534" y="7836198"/>
+            <a:off x="5279534" y="7602836"/>
             <a:ext cx="355688" cy="355688"/>
           </a:xfrm>
           <a:prstGeom prst="ellipse">
@@ -15821,7 +15821,7 @@
         </p:nvSpPr>
         <p:spPr>
           <a:xfrm>
-            <a:off x="2736044" y="7836198"/>
+            <a:off x="2736044" y="7602836"/>
             <a:ext cx="355688" cy="355688"/>
           </a:xfrm>
           <a:prstGeom prst="ellipse">
@@ -15871,7 +15871,7 @@
         </p:nvSpPr>
         <p:spPr>
           <a:xfrm>
-            <a:off x="1893672" y="7468740"/>
+            <a:off x="1893672" y="7235378"/>
             <a:ext cx="739298" cy="739298"/>
           </a:xfrm>
           <a:prstGeom prst="ellipse">
@@ -15928,7 +15928,7 @@
         </p:nvCxnSpPr>
         <p:spPr>
           <a:xfrm>
-            <a:off x="1630860" y="13445692"/>
+            <a:off x="1630862" y="13212330"/>
             <a:ext cx="5601691" cy="0"/>
           </a:xfrm>
           <a:prstGeom prst="line">
@@ -15964,7 +15964,7 @@
         </p:nvSpPr>
         <p:spPr>
           <a:xfrm>
-            <a:off x="3413328" y="12258848"/>
+            <a:off x="3413330" y="12025488"/>
             <a:ext cx="1786965" cy="985829"/>
           </a:xfrm>
           <a:custGeom>
@@ -16051,7 +16051,7 @@
         </p:nvCxnSpPr>
         <p:spPr>
           <a:xfrm>
-            <a:off x="5200292" y="13228641"/>
+            <a:off x="5200292" y="12995279"/>
             <a:ext cx="903176" cy="0"/>
           </a:xfrm>
           <a:prstGeom prst="line">
@@ -16095,7 +16095,7 @@
         </p:nvCxnSpPr>
         <p:spPr>
           <a:xfrm flipH="1" flipV="1">
-            <a:off x="2835480" y="13228659"/>
+            <a:off x="2835480" y="12995299"/>
             <a:ext cx="577846" cy="16033"/>
           </a:xfrm>
           <a:prstGeom prst="straightConnector1">
@@ -16137,7 +16137,7 @@
         </p:nvSpPr>
         <p:spPr>
           <a:xfrm>
-            <a:off x="6200736" y="13073866"/>
+            <a:off x="6200736" y="12840504"/>
             <a:ext cx="355688" cy="355688"/>
           </a:xfrm>
           <a:prstGeom prst="ellipse">
@@ -16192,7 +16192,7 @@
         </p:nvSpPr>
         <p:spPr>
           <a:xfrm>
-            <a:off x="2469434" y="13073860"/>
+            <a:off x="2469434" y="12840498"/>
             <a:ext cx="355688" cy="355688"/>
           </a:xfrm>
           <a:prstGeom prst="ellipse">
@@ -16242,7 +16242,7 @@
         </p:nvSpPr>
         <p:spPr>
           <a:xfrm>
-            <a:off x="1627055" y="12706402"/>
+            <a:off x="1627055" y="12473040"/>
             <a:ext cx="739298" cy="739298"/>
           </a:xfrm>
           <a:prstGeom prst="ellipse">
@@ -16299,7 +16299,7 @@
         </p:nvCxnSpPr>
         <p:spPr>
           <a:xfrm>
-            <a:off x="1630860" y="11455523"/>
+            <a:off x="1630862" y="11222161"/>
             <a:ext cx="5601691" cy="0"/>
           </a:xfrm>
           <a:prstGeom prst="line">
@@ -16335,7 +16335,7 @@
         </p:nvSpPr>
         <p:spPr>
           <a:xfrm>
-            <a:off x="6200736" y="11083697"/>
+            <a:off x="6200736" y="10850335"/>
             <a:ext cx="355688" cy="355688"/>
           </a:xfrm>
           <a:prstGeom prst="ellipse">
@@ -16390,7 +16390,7 @@
         </p:nvSpPr>
         <p:spPr>
           <a:xfrm>
-            <a:off x="2469434" y="11083697"/>
+            <a:off x="2469434" y="10850335"/>
             <a:ext cx="355688" cy="355688"/>
           </a:xfrm>
           <a:prstGeom prst="ellipse">
@@ -16440,7 +16440,7 @@
         </p:nvSpPr>
         <p:spPr>
           <a:xfrm>
-            <a:off x="1627055" y="10716233"/>
+            <a:off x="1627055" y="10482871"/>
             <a:ext cx="739298" cy="739298"/>
           </a:xfrm>
           <a:prstGeom prst="ellipse">
@@ -16497,7 +16497,7 @@
         </p:nvCxnSpPr>
         <p:spPr>
           <a:xfrm flipH="1">
-            <a:off x="2948107" y="11261532"/>
+            <a:off x="2948109" y="11028170"/>
             <a:ext cx="3143621" cy="0"/>
           </a:xfrm>
           <a:prstGeom prst="straightConnector1">
@@ -16536,7 +16536,7 @@
         </p:nvSpPr>
         <p:spPr>
           <a:xfrm>
-            <a:off x="1903498" y="5662515"/>
+            <a:off x="1903498" y="5429153"/>
             <a:ext cx="739298" cy="739298"/>
           </a:xfrm>
           <a:prstGeom prst="ellipse">
@@ -16591,7 +16591,7 @@
         </p:nvSpPr>
         <p:spPr>
           <a:xfrm>
-            <a:off x="6461465" y="6048339"/>
+            <a:off x="6461465" y="5814977"/>
             <a:ext cx="355688" cy="355688"/>
           </a:xfrm>
           <a:prstGeom prst="ellipse">
@@ -16646,7 +16646,7 @@
         </p:nvSpPr>
         <p:spPr>
           <a:xfrm>
-            <a:off x="9790100" y="5677324"/>
+            <a:off x="9790100" y="5443962"/>
             <a:ext cx="739298" cy="739298"/>
           </a:xfrm>
           <a:prstGeom prst="ellipse">
@@ -16701,7 +16701,7 @@
         </p:nvSpPr>
         <p:spPr>
           <a:xfrm>
-            <a:off x="14355526" y="6058115"/>
+            <a:off x="14355526" y="5824753"/>
             <a:ext cx="355688" cy="355688"/>
           </a:xfrm>
           <a:prstGeom prst="ellipse">
@@ -16758,7 +16758,7 @@
         </p:nvCxnSpPr>
         <p:spPr>
           <a:xfrm>
-            <a:off x="22865592" y="6409090"/>
+            <a:off x="22865594" y="6175728"/>
             <a:ext cx="5601691" cy="0"/>
           </a:xfrm>
           <a:prstGeom prst="line">
@@ -16794,7 +16794,7 @@
         </p:nvSpPr>
         <p:spPr>
           <a:xfrm>
-            <a:off x="25367571" y="5452838"/>
+            <a:off x="25367573" y="5219478"/>
             <a:ext cx="370541" cy="940335"/>
           </a:xfrm>
           <a:prstGeom prst="rect">
@@ -16840,7 +16840,7 @@
         </p:nvSpPr>
         <p:spPr>
           <a:xfrm>
-            <a:off x="27535654" y="6228628"/>
+            <a:off x="27535654" y="5995266"/>
             <a:ext cx="168298" cy="168298"/>
           </a:xfrm>
           <a:prstGeom prst="ellipse">
@@ -16886,7 +16886,7 @@
         </p:nvSpPr>
         <p:spPr>
           <a:xfrm>
-            <a:off x="22999671" y="5930567"/>
+            <a:off x="22999671" y="5697205"/>
             <a:ext cx="464094" cy="464094"/>
           </a:xfrm>
           <a:prstGeom prst="ellipse">
@@ -16932,7 +16932,7 @@
         </p:nvSpPr>
         <p:spPr>
           <a:xfrm>
-            <a:off x="27435455" y="6037258"/>
+            <a:off x="27435455" y="5803896"/>
             <a:ext cx="355688" cy="355688"/>
           </a:xfrm>
           <a:prstGeom prst="ellipse">
@@ -16984,7 +16984,7 @@
         </p:nvCxnSpPr>
         <p:spPr>
           <a:xfrm flipV="1">
-            <a:off x="27603757" y="6041232"/>
+            <a:off x="27603757" y="5807870"/>
             <a:ext cx="0" cy="178778"/>
           </a:xfrm>
           <a:prstGeom prst="straightConnector1">
@@ -17029,7 +17029,7 @@
         </p:nvCxnSpPr>
         <p:spPr>
           <a:xfrm rot="-1200000" flipH="1" flipV="1">
-            <a:off x="27467679" y="6121149"/>
+            <a:off x="27467681" y="5887787"/>
             <a:ext cx="91839" cy="146292"/>
           </a:xfrm>
           <a:prstGeom prst="straightConnector1">
@@ -17074,7 +17074,7 @@
         </p:nvCxnSpPr>
         <p:spPr>
           <a:xfrm rot="1200000" flipV="1">
-            <a:off x="27708456" y="6086025"/>
+            <a:off x="27708456" y="5852663"/>
             <a:ext cx="0" cy="178778"/>
           </a:xfrm>
           <a:prstGeom prst="straightConnector1">
@@ -17117,7 +17117,7 @@
         </p:nvSpPr>
         <p:spPr>
           <a:xfrm>
-            <a:off x="22861775" y="5669800"/>
+            <a:off x="22861775" y="5436438"/>
             <a:ext cx="739298" cy="739298"/>
           </a:xfrm>
           <a:prstGeom prst="ellipse">
@@ -17169,7 +17169,7 @@
         </p:nvCxnSpPr>
         <p:spPr>
           <a:xfrm flipH="1" flipV="1">
-            <a:off x="23215528" y="5685702"/>
+            <a:off x="23215528" y="5452342"/>
             <a:ext cx="4420" cy="233997"/>
           </a:xfrm>
           <a:prstGeom prst="straightConnector1">
@@ -17214,7 +17214,7 @@
         </p:nvCxnSpPr>
         <p:spPr>
           <a:xfrm rot="3000000" flipH="1" flipV="1">
-            <a:off x="23463558" y="5809172"/>
+            <a:off x="23463558" y="5575812"/>
             <a:ext cx="4420" cy="197997"/>
           </a:xfrm>
           <a:prstGeom prst="straightConnector1">
@@ -17259,7 +17259,7 @@
         </p:nvCxnSpPr>
         <p:spPr>
           <a:xfrm rot="-3000000" flipH="1" flipV="1">
-            <a:off x="22997459" y="5817126"/>
+            <a:off x="22997459" y="5583766"/>
             <a:ext cx="4420" cy="197997"/>
           </a:xfrm>
           <a:prstGeom prst="straightConnector1">
@@ -17304,7 +17304,7 @@
         </p:nvCxnSpPr>
         <p:spPr>
           <a:xfrm>
-            <a:off x="22861784" y="8354925"/>
+            <a:off x="22861786" y="8121563"/>
             <a:ext cx="5601691" cy="0"/>
           </a:xfrm>
           <a:prstGeom prst="line">
@@ -17340,7 +17340,7 @@
         </p:nvSpPr>
         <p:spPr>
           <a:xfrm>
-            <a:off x="25363764" y="7398679"/>
+            <a:off x="25363766" y="7165319"/>
             <a:ext cx="370541" cy="940335"/>
           </a:xfrm>
           <a:prstGeom prst="rect">
@@ -17386,7 +17386,7 @@
         </p:nvSpPr>
         <p:spPr>
           <a:xfrm>
-            <a:off x="24644254" y="7168087"/>
+            <a:off x="24644256" y="6934727"/>
             <a:ext cx="1786965" cy="985829"/>
           </a:xfrm>
           <a:custGeom>
@@ -17473,7 +17473,7 @@
         </p:nvCxnSpPr>
         <p:spPr>
           <a:xfrm>
-            <a:off x="26431204" y="8137876"/>
+            <a:off x="26431204" y="7904514"/>
             <a:ext cx="903176" cy="0"/>
           </a:xfrm>
           <a:prstGeom prst="line">
@@ -17517,7 +17517,7 @@
         </p:nvCxnSpPr>
         <p:spPr>
           <a:xfrm flipH="1" flipV="1">
-            <a:off x="24066401" y="8137896"/>
+            <a:off x="24066401" y="7904536"/>
             <a:ext cx="577846" cy="16033"/>
           </a:xfrm>
           <a:prstGeom prst="straightConnector1">
@@ -17559,7 +17559,7 @@
         </p:nvSpPr>
         <p:spPr>
           <a:xfrm>
-            <a:off x="27431657" y="7983102"/>
+            <a:off x="27431657" y="7749740"/>
             <a:ext cx="355688" cy="355688"/>
           </a:xfrm>
           <a:prstGeom prst="ellipse">
@@ -17614,7 +17614,7 @@
         </p:nvSpPr>
         <p:spPr>
           <a:xfrm>
-            <a:off x="23700348" y="7983102"/>
+            <a:off x="23700348" y="7749740"/>
             <a:ext cx="355688" cy="355688"/>
           </a:xfrm>
           <a:prstGeom prst="ellipse">
@@ -17664,7 +17664,7 @@
         </p:nvSpPr>
         <p:spPr>
           <a:xfrm>
-            <a:off x="22857967" y="7615635"/>
+            <a:off x="22857967" y="7382273"/>
             <a:ext cx="739298" cy="739298"/>
           </a:xfrm>
           <a:prstGeom prst="ellipse">
@@ -17721,7 +17721,7 @@
         </p:nvCxnSpPr>
         <p:spPr>
           <a:xfrm>
-            <a:off x="22727040" y="13707286"/>
+            <a:off x="22727042" y="13473924"/>
             <a:ext cx="5601691" cy="0"/>
           </a:xfrm>
           <a:prstGeom prst="line">
@@ -17757,7 +17757,7 @@
         </p:nvSpPr>
         <p:spPr>
           <a:xfrm>
-            <a:off x="24509509" y="12520447"/>
+            <a:off x="24509511" y="12287087"/>
             <a:ext cx="1786965" cy="985829"/>
           </a:xfrm>
           <a:custGeom>
@@ -17844,7 +17844,7 @@
         </p:nvCxnSpPr>
         <p:spPr>
           <a:xfrm>
-            <a:off x="26296460" y="13490235"/>
+            <a:off x="26296460" y="13256873"/>
             <a:ext cx="903176" cy="0"/>
           </a:xfrm>
           <a:prstGeom prst="line">
@@ -17888,7 +17888,7 @@
         </p:nvCxnSpPr>
         <p:spPr>
           <a:xfrm flipH="1" flipV="1">
-            <a:off x="23931655" y="13490256"/>
+            <a:off x="23931655" y="13256896"/>
             <a:ext cx="577846" cy="16033"/>
           </a:xfrm>
           <a:prstGeom prst="straightConnector1">
@@ -17930,7 +17930,7 @@
         </p:nvSpPr>
         <p:spPr>
           <a:xfrm>
-            <a:off x="27296911" y="13335460"/>
+            <a:off x="27296911" y="13102098"/>
             <a:ext cx="355688" cy="355688"/>
           </a:xfrm>
           <a:prstGeom prst="ellipse">
@@ -17985,7 +17985,7 @@
         </p:nvSpPr>
         <p:spPr>
           <a:xfrm>
-            <a:off x="23565602" y="13335454"/>
+            <a:off x="23565602" y="13102092"/>
             <a:ext cx="355688" cy="355688"/>
           </a:xfrm>
           <a:prstGeom prst="ellipse">
@@ -18035,7 +18035,7 @@
         </p:nvSpPr>
         <p:spPr>
           <a:xfrm>
-            <a:off x="22723229" y="12967995"/>
+            <a:off x="22723229" y="12734633"/>
             <a:ext cx="739298" cy="739298"/>
           </a:xfrm>
           <a:prstGeom prst="ellipse">
@@ -18090,7 +18090,7 @@
         </p:nvSpPr>
         <p:spPr>
           <a:xfrm>
-            <a:off x="24880681" y="7373011"/>
+            <a:off x="24880681" y="7139651"/>
             <a:ext cx="1338190" cy="985829"/>
           </a:xfrm>
           <a:prstGeom prst="rect">
@@ -18148,7 +18148,7 @@
         </p:nvSpPr>
         <p:spPr>
           <a:xfrm>
-            <a:off x="21988013" y="2897233"/>
+            <a:off x="21988013" y="2663872"/>
             <a:ext cx="6808274" cy="1015663"/>
           </a:xfrm>
           <a:prstGeom prst="rect">
@@ -18188,7 +18188,7 @@
         </p:nvCxnSpPr>
         <p:spPr>
           <a:xfrm>
-            <a:off x="22720413" y="11565879"/>
+            <a:off x="22720415" y="11332517"/>
             <a:ext cx="5601691" cy="0"/>
           </a:xfrm>
           <a:prstGeom prst="line">
@@ -18224,7 +18224,7 @@
         </p:nvSpPr>
         <p:spPr>
           <a:xfrm>
-            <a:off x="24502883" y="10379041"/>
+            <a:off x="24502885" y="10145681"/>
             <a:ext cx="1786965" cy="985829"/>
           </a:xfrm>
           <a:custGeom>
@@ -18311,7 +18311,7 @@
         </p:nvCxnSpPr>
         <p:spPr>
           <a:xfrm>
-            <a:off x="26289833" y="11348829"/>
+            <a:off x="26289833" y="11115467"/>
             <a:ext cx="903176" cy="0"/>
           </a:xfrm>
           <a:prstGeom prst="line">
@@ -18355,7 +18355,7 @@
         </p:nvCxnSpPr>
         <p:spPr>
           <a:xfrm flipH="1" flipV="1">
-            <a:off x="23925028" y="11348849"/>
+            <a:off x="23925028" y="11115489"/>
             <a:ext cx="577846" cy="16033"/>
           </a:xfrm>
           <a:prstGeom prst="straightConnector1">
@@ -18397,7 +18397,7 @@
         </p:nvSpPr>
         <p:spPr>
           <a:xfrm>
-            <a:off x="27290283" y="11194048"/>
+            <a:off x="27290283" y="10960686"/>
             <a:ext cx="355688" cy="355688"/>
           </a:xfrm>
           <a:prstGeom prst="ellipse">
@@ -18452,7 +18452,7 @@
         </p:nvSpPr>
         <p:spPr>
           <a:xfrm>
-            <a:off x="23558977" y="11194048"/>
+            <a:off x="23558977" y="10960686"/>
             <a:ext cx="355688" cy="355688"/>
           </a:xfrm>
           <a:prstGeom prst="ellipse">
@@ -18502,7 +18502,7 @@
         </p:nvSpPr>
         <p:spPr>
           <a:xfrm>
-            <a:off x="22716603" y="10826589"/>
+            <a:off x="22716603" y="10593227"/>
             <a:ext cx="739298" cy="739298"/>
           </a:xfrm>
           <a:prstGeom prst="ellipse">
@@ -18557,7 +18557,7 @@
         </p:nvSpPr>
         <p:spPr>
           <a:xfrm>
-            <a:off x="25221819" y="10625559"/>
+            <a:off x="25221821" y="10392199"/>
             <a:ext cx="370541" cy="940335"/>
           </a:xfrm>
           <a:prstGeom prst="rect">
@@ -18605,7 +18605,7 @@
         </p:nvCxnSpPr>
         <p:spPr>
           <a:xfrm>
-            <a:off x="29656910" y="6192920"/>
+            <a:off x="29656912" y="5959558"/>
             <a:ext cx="6800531" cy="0"/>
           </a:xfrm>
           <a:prstGeom prst="line">
@@ -18641,7 +18641,7 @@
         </p:nvSpPr>
         <p:spPr>
           <a:xfrm>
-            <a:off x="33357739" y="5236665"/>
+            <a:off x="33357741" y="5003305"/>
             <a:ext cx="370541" cy="940335"/>
           </a:xfrm>
           <a:prstGeom prst="rect">
@@ -18687,7 +18687,7 @@
         </p:nvSpPr>
         <p:spPr>
           <a:xfrm>
-            <a:off x="35525818" y="6012445"/>
+            <a:off x="35525818" y="5779083"/>
             <a:ext cx="168298" cy="168298"/>
           </a:xfrm>
           <a:prstGeom prst="ellipse">
@@ -18733,7 +18733,7 @@
         </p:nvSpPr>
         <p:spPr>
           <a:xfrm>
-            <a:off x="29714497" y="5714403"/>
+            <a:off x="29714497" y="5481041"/>
             <a:ext cx="464094" cy="464094"/>
           </a:xfrm>
           <a:prstGeom prst="ellipse">
@@ -18779,7 +18779,7 @@
         </p:nvSpPr>
         <p:spPr>
           <a:xfrm>
-            <a:off x="35425626" y="5821088"/>
+            <a:off x="35425626" y="5587726"/>
             <a:ext cx="355688" cy="355688"/>
           </a:xfrm>
           <a:prstGeom prst="ellipse">
@@ -18831,7 +18831,7 @@
         </p:nvCxnSpPr>
         <p:spPr>
           <a:xfrm flipV="1">
-            <a:off x="35593921" y="5825062"/>
+            <a:off x="35593921" y="5591700"/>
             <a:ext cx="0" cy="178778"/>
           </a:xfrm>
           <a:prstGeom prst="straightConnector1">
@@ -18876,7 +18876,7 @@
         </p:nvCxnSpPr>
         <p:spPr>
           <a:xfrm flipH="1" flipV="1">
-            <a:off x="35435590" y="5925106"/>
+            <a:off x="35435592" y="5691746"/>
             <a:ext cx="136339" cy="106059"/>
           </a:xfrm>
           <a:prstGeom prst="straightConnector1">
@@ -18921,7 +18921,7 @@
         </p:nvCxnSpPr>
         <p:spPr>
           <a:xfrm flipV="1">
-            <a:off x="35668047" y="5875251"/>
+            <a:off x="35668047" y="5641889"/>
             <a:ext cx="61146" cy="167992"/>
           </a:xfrm>
           <a:prstGeom prst="straightConnector1">
@@ -18964,7 +18964,7 @@
         </p:nvSpPr>
         <p:spPr>
           <a:xfrm>
-            <a:off x="29576595" y="5453623"/>
+            <a:off x="29576595" y="5220261"/>
             <a:ext cx="739298" cy="739298"/>
           </a:xfrm>
           <a:prstGeom prst="ellipse">
@@ -19016,7 +19016,7 @@
         </p:nvCxnSpPr>
         <p:spPr>
           <a:xfrm flipH="1" flipV="1">
-            <a:off x="29930340" y="5469528"/>
+            <a:off x="29930340" y="5236168"/>
             <a:ext cx="4420" cy="233997"/>
           </a:xfrm>
           <a:prstGeom prst="straightConnector1">
@@ -19061,7 +19061,7 @@
         </p:nvCxnSpPr>
         <p:spPr>
           <a:xfrm flipV="1">
-            <a:off x="30106170" y="5626663"/>
+            <a:off x="30106170" y="5393301"/>
             <a:ext cx="148836" cy="130658"/>
           </a:xfrm>
           <a:prstGeom prst="straightConnector1">
@@ -19106,7 +19106,7 @@
         </p:nvCxnSpPr>
         <p:spPr>
           <a:xfrm flipH="1" flipV="1">
-            <a:off x="29637219" y="5638018"/>
+            <a:off x="29637219" y="5404658"/>
             <a:ext cx="154518" cy="123885"/>
           </a:xfrm>
           <a:prstGeom prst="straightConnector1">
@@ -19151,7 +19151,7 @@
         </p:nvCxnSpPr>
         <p:spPr>
           <a:xfrm>
-            <a:off x="29600086" y="8138755"/>
+            <a:off x="29600088" y="7905393"/>
             <a:ext cx="6853563" cy="0"/>
           </a:xfrm>
           <a:prstGeom prst="line">
@@ -19187,7 +19187,7 @@
         </p:nvSpPr>
         <p:spPr>
           <a:xfrm>
-            <a:off x="33353933" y="7182501"/>
+            <a:off x="33353935" y="6949141"/>
             <a:ext cx="370541" cy="940335"/>
           </a:xfrm>
           <a:prstGeom prst="rect">
@@ -19233,7 +19233,7 @@
         </p:nvSpPr>
         <p:spPr>
           <a:xfrm>
-            <a:off x="32634417" y="6951914"/>
+            <a:off x="32634419" y="6718554"/>
             <a:ext cx="1786965" cy="985829"/>
           </a:xfrm>
           <a:custGeom>
@@ -19320,7 +19320,7 @@
         </p:nvCxnSpPr>
         <p:spPr>
           <a:xfrm>
-            <a:off x="34421369" y="7921705"/>
+            <a:off x="34421369" y="7688343"/>
             <a:ext cx="903176" cy="0"/>
           </a:xfrm>
           <a:prstGeom prst="line">
@@ -19364,7 +19364,7 @@
         </p:nvCxnSpPr>
         <p:spPr>
           <a:xfrm flipH="1" flipV="1">
-            <a:off x="32056564" y="7921725"/>
+            <a:off x="32056564" y="7688365"/>
             <a:ext cx="577846" cy="16033"/>
           </a:xfrm>
           <a:prstGeom prst="straightConnector1">
@@ -19406,7 +19406,7 @@
         </p:nvSpPr>
         <p:spPr>
           <a:xfrm>
-            <a:off x="35421819" y="7766930"/>
+            <a:off x="35421819" y="7533568"/>
             <a:ext cx="355688" cy="355688"/>
           </a:xfrm>
           <a:prstGeom prst="ellipse">
@@ -19461,7 +19461,7 @@
         </p:nvSpPr>
         <p:spPr>
           <a:xfrm>
-            <a:off x="31690511" y="7766923"/>
+            <a:off x="31690511" y="7533561"/>
             <a:ext cx="355688" cy="355688"/>
           </a:xfrm>
           <a:prstGeom prst="ellipse">
@@ -19511,7 +19511,7 @@
         </p:nvSpPr>
         <p:spPr>
           <a:xfrm>
-            <a:off x="29632948" y="7399464"/>
+            <a:off x="29632948" y="7166102"/>
             <a:ext cx="739298" cy="739298"/>
           </a:xfrm>
           <a:prstGeom prst="ellipse">
@@ -19566,7 +19566,7 @@
         </p:nvSpPr>
         <p:spPr>
           <a:xfrm>
-            <a:off x="29589536" y="7721069"/>
+            <a:off x="29589536" y="7487707"/>
             <a:ext cx="2858698" cy="401982"/>
           </a:xfrm>
           <a:prstGeom prst="rect">
@@ -19626,7 +19626,7 @@
         </p:nvCxnSpPr>
         <p:spPr>
           <a:xfrm>
-            <a:off x="29340841" y="11334649"/>
+            <a:off x="29340843" y="11101287"/>
             <a:ext cx="6853563" cy="0"/>
           </a:xfrm>
           <a:prstGeom prst="line">
@@ -19662,7 +19662,7 @@
         </p:nvSpPr>
         <p:spPr>
           <a:xfrm>
-            <a:off x="35162576" y="10962816"/>
+            <a:off x="35162576" y="10729454"/>
             <a:ext cx="355688" cy="355688"/>
           </a:xfrm>
           <a:prstGeom prst="ellipse">
@@ -19717,7 +19717,7 @@
         </p:nvSpPr>
         <p:spPr>
           <a:xfrm>
-            <a:off x="30167950" y="10962816"/>
+            <a:off x="30167950" y="10729454"/>
             <a:ext cx="355688" cy="355688"/>
           </a:xfrm>
           <a:prstGeom prst="ellipse">
@@ -19767,7 +19767,7 @@
         </p:nvSpPr>
         <p:spPr>
           <a:xfrm>
-            <a:off x="29373696" y="10595359"/>
+            <a:off x="29373696" y="10361997"/>
             <a:ext cx="739298" cy="739298"/>
           </a:xfrm>
           <a:prstGeom prst="ellipse">
@@ -19824,7 +19824,7 @@
         </p:nvCxnSpPr>
         <p:spPr>
           <a:xfrm flipH="1">
-            <a:off x="30676148" y="11110958"/>
+            <a:off x="30676150" y="10877596"/>
             <a:ext cx="4211935" cy="0"/>
           </a:xfrm>
           <a:prstGeom prst="straightConnector1">
@@ -19865,7 +19865,7 @@
         </p:nvCxnSpPr>
         <p:spPr>
           <a:xfrm>
-            <a:off x="29284002" y="13478369"/>
+            <a:off x="29284004" y="13245007"/>
             <a:ext cx="6853563" cy="0"/>
           </a:xfrm>
           <a:prstGeom prst="line">
@@ -19901,7 +19901,7 @@
         </p:nvSpPr>
         <p:spPr>
           <a:xfrm>
-            <a:off x="35105737" y="13106545"/>
+            <a:off x="35105737" y="12873183"/>
             <a:ext cx="355688" cy="355688"/>
           </a:xfrm>
           <a:prstGeom prst="ellipse">
@@ -19956,7 +19956,7 @@
         </p:nvSpPr>
         <p:spPr>
           <a:xfrm>
-            <a:off x="31651159" y="13106545"/>
+            <a:off x="31651159" y="12873183"/>
             <a:ext cx="355688" cy="355688"/>
           </a:xfrm>
           <a:prstGeom prst="ellipse">
@@ -20006,7 +20006,7 @@
         </p:nvSpPr>
         <p:spPr>
           <a:xfrm>
-            <a:off x="29316865" y="12739079"/>
+            <a:off x="29316865" y="12505717"/>
             <a:ext cx="739298" cy="739298"/>
           </a:xfrm>
           <a:prstGeom prst="ellipse">
@@ -20063,7 +20063,7 @@
         </p:nvCxnSpPr>
         <p:spPr>
           <a:xfrm flipH="1">
-            <a:off x="32084727" y="13254678"/>
+            <a:off x="32084727" y="13021316"/>
             <a:ext cx="2746520" cy="0"/>
           </a:xfrm>
           <a:prstGeom prst="straightConnector1">
@@ -20102,7 +20102,7 @@
         </p:nvSpPr>
         <p:spPr>
           <a:xfrm>
-            <a:off x="30791219" y="2936832"/>
+            <a:off x="30791221" y="2703472"/>
             <a:ext cx="4907113" cy="1015663"/>
           </a:xfrm>
           <a:prstGeom prst="rect">
@@ -20142,7 +20142,7 @@
         </p:nvCxnSpPr>
         <p:spPr>
           <a:xfrm>
-            <a:off x="9978341" y="13529144"/>
+            <a:off x="9978343" y="13295782"/>
             <a:ext cx="5601691" cy="0"/>
           </a:xfrm>
           <a:prstGeom prst="line">
@@ -20178,7 +20178,7 @@
         </p:nvSpPr>
         <p:spPr>
           <a:xfrm>
-            <a:off x="11760812" y="12342305"/>
+            <a:off x="11760814" y="12108945"/>
             <a:ext cx="1786965" cy="985829"/>
           </a:xfrm>
           <a:custGeom>
@@ -20265,7 +20265,7 @@
         </p:nvCxnSpPr>
         <p:spPr>
           <a:xfrm>
-            <a:off x="13547762" y="13312094"/>
+            <a:off x="13547762" y="13078732"/>
             <a:ext cx="903176" cy="0"/>
           </a:xfrm>
           <a:prstGeom prst="line">
@@ -20308,7 +20308,7 @@
         </p:nvCxnSpPr>
         <p:spPr>
           <a:xfrm>
-            <a:off x="13846645" y="13216935"/>
+            <a:off x="13846647" y="12983573"/>
             <a:ext cx="508887" cy="0"/>
           </a:xfrm>
           <a:prstGeom prst="straightConnector1">
@@ -20353,7 +20353,7 @@
         </p:nvCxnSpPr>
         <p:spPr>
           <a:xfrm rot="10800000">
-            <a:off x="13846645" y="13393937"/>
+            <a:off x="13846647" y="13160575"/>
             <a:ext cx="508887" cy="0"/>
           </a:xfrm>
           <a:prstGeom prst="straightConnector1">
@@ -20399,7 +20399,7 @@
         </p:nvCxnSpPr>
         <p:spPr>
           <a:xfrm flipH="1" flipV="1">
-            <a:off x="11182956" y="13312114"/>
+            <a:off x="11182956" y="13078754"/>
             <a:ext cx="577846" cy="16033"/>
           </a:xfrm>
           <a:prstGeom prst="straightConnector1">
@@ -20441,7 +20441,7 @@
         </p:nvSpPr>
         <p:spPr>
           <a:xfrm>
-            <a:off x="14548211" y="13157312"/>
+            <a:off x="14548211" y="12923950"/>
             <a:ext cx="355688" cy="355688"/>
           </a:xfrm>
           <a:prstGeom prst="ellipse">
@@ -20496,7 +20496,7 @@
         </p:nvSpPr>
         <p:spPr>
           <a:xfrm>
-            <a:off x="10816904" y="13157312"/>
+            <a:off x="10816904" y="12923950"/>
             <a:ext cx="355688" cy="355688"/>
           </a:xfrm>
           <a:prstGeom prst="ellipse">
@@ -20546,7 +20546,7 @@
         </p:nvSpPr>
         <p:spPr>
           <a:xfrm>
-            <a:off x="9974531" y="12789847"/>
+            <a:off x="9974531" y="12556485"/>
             <a:ext cx="739298" cy="739298"/>
           </a:xfrm>
           <a:prstGeom prst="ellipse">
@@ -20603,7 +20603,7 @@
         </p:nvCxnSpPr>
         <p:spPr>
           <a:xfrm>
-            <a:off x="9978341" y="11538976"/>
+            <a:off x="9978343" y="11305614"/>
             <a:ext cx="5601691" cy="0"/>
           </a:xfrm>
           <a:prstGeom prst="line">
@@ -20639,7 +20639,7 @@
         </p:nvSpPr>
         <p:spPr>
           <a:xfrm>
-            <a:off x="14548211" y="11167144"/>
+            <a:off x="14548211" y="10933782"/>
             <a:ext cx="355688" cy="355688"/>
           </a:xfrm>
           <a:prstGeom prst="ellipse">
@@ -20694,7 +20694,7 @@
         </p:nvSpPr>
         <p:spPr>
           <a:xfrm>
-            <a:off x="10816904" y="11167144"/>
+            <a:off x="10816904" y="10933782"/>
             <a:ext cx="355688" cy="355688"/>
           </a:xfrm>
           <a:prstGeom prst="ellipse">
@@ -20744,7 +20744,7 @@
         </p:nvSpPr>
         <p:spPr>
           <a:xfrm>
-            <a:off x="9974531" y="10799684"/>
+            <a:off x="9974531" y="10566322"/>
             <a:ext cx="739298" cy="739298"/>
           </a:xfrm>
           <a:prstGeom prst="ellipse">
@@ -20801,7 +20801,7 @@
         </p:nvCxnSpPr>
         <p:spPr>
           <a:xfrm flipH="1">
-            <a:off x="11295583" y="11344978"/>
+            <a:off x="11295585" y="11111616"/>
             <a:ext cx="3143621" cy="0"/>
           </a:xfrm>
           <a:prstGeom prst="straightConnector1">
@@ -20826,150 +20826,6 @@
           </a:fontRef>
         </p:style>
       </p:cxnSp>
-      <p:pic>
-        <p:nvPicPr>
-          <p:cNvPr id="15" name="Picture 14">
-            <a:extLst>
-              <a:ext uri="{FF2B5EF4-FFF2-40B4-BE49-F238E27FC236}">
-                <a16:creationId xmlns:a16="http://schemas.microsoft.com/office/drawing/2014/main" id="{D1FB17DF-A1A7-56E1-1344-188869C4E26E}"/>
-              </a:ext>
-            </a:extLst>
-          </p:cNvPr>
-          <p:cNvPicPr>
-            <a:picLocks noChangeAspect="1"/>
-          </p:cNvPicPr>
-          <p:nvPr/>
-        </p:nvPicPr>
-        <p:blipFill>
-          <a:blip r:embed="rId3">
-            <a:extLst>
-              <a:ext uri="{28A0092B-C50C-407E-A947-70E740481C1C}">
-                <a14:useLocalDpi xmlns:a14="http://schemas.microsoft.com/office/drawing/2010/main" val="0"/>
-              </a:ext>
-            </a:extLst>
-          </a:blip>
-          <a:stretch>
-            <a:fillRect/>
-          </a:stretch>
-        </p:blipFill>
-        <p:spPr>
-          <a:xfrm>
-            <a:off x="21394592" y="15934280"/>
-            <a:ext cx="7323596" cy="5231140"/>
-          </a:xfrm>
-          <a:prstGeom prst="rect">
-            <a:avLst/>
-          </a:prstGeom>
-        </p:spPr>
-      </p:pic>
-      <p:pic>
-        <p:nvPicPr>
-          <p:cNvPr id="17" name="Picture 16">
-            <a:extLst>
-              <a:ext uri="{FF2B5EF4-FFF2-40B4-BE49-F238E27FC236}">
-                <a16:creationId xmlns:a16="http://schemas.microsoft.com/office/drawing/2014/main" id="{DC3808C6-F00A-E3AC-8B33-7EFA24EC4D7C}"/>
-              </a:ext>
-            </a:extLst>
-          </p:cNvPr>
-          <p:cNvPicPr>
-            <a:picLocks/>
-          </p:cNvPicPr>
-          <p:nvPr/>
-        </p:nvPicPr>
-        <p:blipFill>
-          <a:blip r:embed="rId4">
-            <a:extLst>
-              <a:ext uri="{28A0092B-C50C-407E-A947-70E740481C1C}">
-                <a14:useLocalDpi xmlns:a14="http://schemas.microsoft.com/office/drawing/2010/main" val="0"/>
-              </a:ext>
-            </a:extLst>
-          </a:blip>
-          <a:stretch>
-            <a:fillRect/>
-          </a:stretch>
-        </p:blipFill>
-        <p:spPr>
-          <a:xfrm>
-            <a:off x="30376981" y="15905538"/>
-            <a:ext cx="7322400" cy="5230799"/>
-          </a:xfrm>
-          <a:prstGeom prst="rect">
-            <a:avLst/>
-          </a:prstGeom>
-        </p:spPr>
-      </p:pic>
-      <p:pic>
-        <p:nvPicPr>
-          <p:cNvPr id="78" name="Picture 77">
-            <a:extLst>
-              <a:ext uri="{FF2B5EF4-FFF2-40B4-BE49-F238E27FC236}">
-                <a16:creationId xmlns:a16="http://schemas.microsoft.com/office/drawing/2014/main" id="{331053E8-6485-A2A5-B98A-B89216233CEE}"/>
-              </a:ext>
-            </a:extLst>
-          </p:cNvPr>
-          <p:cNvPicPr>
-            <a:picLocks/>
-          </p:cNvPicPr>
-          <p:nvPr/>
-        </p:nvPicPr>
-        <p:blipFill>
-          <a:blip r:embed="rId5">
-            <a:extLst>
-              <a:ext uri="{28A0092B-C50C-407E-A947-70E740481C1C}">
-                <a14:useLocalDpi xmlns:a14="http://schemas.microsoft.com/office/drawing/2010/main" val="0"/>
-              </a:ext>
-            </a:extLst>
-          </a:blip>
-          <a:stretch>
-            <a:fillRect/>
-          </a:stretch>
-        </p:blipFill>
-        <p:spPr>
-          <a:xfrm>
-            <a:off x="765352" y="15890873"/>
-            <a:ext cx="7322400" cy="5230799"/>
-          </a:xfrm>
-          <a:prstGeom prst="rect">
-            <a:avLst/>
-          </a:prstGeom>
-        </p:spPr>
-      </p:pic>
-      <p:pic>
-        <p:nvPicPr>
-          <p:cNvPr id="84" name="Picture 83">
-            <a:extLst>
-              <a:ext uri="{FF2B5EF4-FFF2-40B4-BE49-F238E27FC236}">
-                <a16:creationId xmlns:a16="http://schemas.microsoft.com/office/drawing/2014/main" id="{9F6F12A0-AAAB-D7CE-27E9-1966E22FE069}"/>
-              </a:ext>
-            </a:extLst>
-          </p:cNvPr>
-          <p:cNvPicPr>
-            <a:picLocks noChangeAspect="1"/>
-          </p:cNvPicPr>
-          <p:nvPr/>
-        </p:nvPicPr>
-        <p:blipFill>
-          <a:blip r:embed="rId6">
-            <a:extLst>
-              <a:ext uri="{28A0092B-C50C-407E-A947-70E740481C1C}">
-                <a14:useLocalDpi xmlns:a14="http://schemas.microsoft.com/office/drawing/2010/main" val="0"/>
-              </a:ext>
-            </a:extLst>
-          </a:blip>
-          <a:stretch>
-            <a:fillRect/>
-          </a:stretch>
-        </p:blipFill>
-        <p:spPr>
-          <a:xfrm>
-            <a:off x="9219013" y="15998497"/>
-            <a:ext cx="7323120" cy="5230799"/>
-          </a:xfrm>
-          <a:prstGeom prst="rect">
-            <a:avLst/>
-          </a:prstGeom>
-        </p:spPr>
-      </p:pic>
       <p:sp>
         <p:nvSpPr>
           <p:cNvPr id="111" name="TextBox 110">
@@ -20984,7 +20840,7 @@
         </p:nvSpPr>
         <p:spPr>
           <a:xfrm>
-            <a:off x="5239964" y="222826"/>
+            <a:off x="5239966" y="-10536"/>
             <a:ext cx="8099077" cy="1323311"/>
           </a:xfrm>
           <a:prstGeom prst="rect">
@@ -21023,7 +20879,7 @@
         </p:nvSpPr>
         <p:spPr>
           <a:xfrm>
-            <a:off x="25840864" y="237717"/>
+            <a:off x="25840866" y="4355"/>
             <a:ext cx="8099077" cy="1323311"/>
           </a:xfrm>
           <a:prstGeom prst="rect">
@@ -21062,7 +20918,7 @@
         </p:nvSpPr>
         <p:spPr>
           <a:xfrm>
-            <a:off x="2663997" y="1650435"/>
+            <a:off x="2663997" y="1417074"/>
             <a:ext cx="13730108" cy="1092607"/>
           </a:xfrm>
           <a:prstGeom prst="rect">
@@ -21101,7 +20957,7 @@
         </p:nvSpPr>
         <p:spPr>
           <a:xfrm>
-            <a:off x="18117345" y="1618128"/>
+            <a:off x="18117345" y="1384767"/>
             <a:ext cx="22020004" cy="1092607"/>
           </a:xfrm>
           <a:prstGeom prst="rect">
@@ -21140,7 +20996,7 @@
         </p:nvSpPr>
         <p:spPr>
           <a:xfrm>
-            <a:off x="1679168" y="2933961"/>
+            <a:off x="1679170" y="2700600"/>
             <a:ext cx="6145465" cy="1015663"/>
           </a:xfrm>
           <a:prstGeom prst="rect">
@@ -21178,8 +21034,8 @@
         </p:nvSpPr>
         <p:spPr>
           <a:xfrm>
-            <a:off x="9233306" y="2986953"/>
-            <a:ext cx="6914906" cy="1228952"/>
+            <a:off x="9233306" y="2753593"/>
+            <a:ext cx="6914906" cy="1015663"/>
           </a:xfrm>
           <a:prstGeom prst="rect">
             <a:avLst/>
@@ -21216,7 +21072,7 @@
         </p:nvSpPr>
         <p:spPr>
           <a:xfrm>
-            <a:off x="3019972" y="4320655"/>
+            <a:off x="3019974" y="4087293"/>
             <a:ext cx="3494867" cy="861774"/>
           </a:xfrm>
           <a:prstGeom prst="rect">
@@ -21254,7 +21110,7 @@
         </p:nvSpPr>
         <p:spPr>
           <a:xfrm>
-            <a:off x="10804806" y="4323767"/>
+            <a:off x="10804808" y="4090405"/>
             <a:ext cx="3494867" cy="861774"/>
           </a:xfrm>
           <a:prstGeom prst="rect">
@@ -21292,7 +21148,7 @@
         </p:nvSpPr>
         <p:spPr>
           <a:xfrm>
-            <a:off x="4086770" y="9362289"/>
+            <a:off x="4086770" y="9128927"/>
             <a:ext cx="1302408" cy="861774"/>
           </a:xfrm>
           <a:prstGeom prst="rect">
@@ -21330,7 +21186,7 @@
         </p:nvSpPr>
         <p:spPr>
           <a:xfrm>
-            <a:off x="11871604" y="9365401"/>
+            <a:off x="11871604" y="9132039"/>
             <a:ext cx="1302408" cy="861774"/>
           </a:xfrm>
           <a:prstGeom prst="rect">
@@ -21368,7 +21224,7 @@
         </p:nvSpPr>
         <p:spPr>
           <a:xfrm>
-            <a:off x="23606389" y="4323767"/>
+            <a:off x="23606391" y="4090405"/>
             <a:ext cx="3494867" cy="861774"/>
           </a:xfrm>
           <a:prstGeom prst="rect">
@@ -21406,7 +21262,7 @@
         </p:nvSpPr>
         <p:spPr>
           <a:xfrm>
-            <a:off x="31391223" y="4326879"/>
+            <a:off x="31391225" y="4093517"/>
             <a:ext cx="3494867" cy="861774"/>
           </a:xfrm>
           <a:prstGeom prst="rect">
@@ -21444,7 +21300,7 @@
         </p:nvSpPr>
         <p:spPr>
           <a:xfrm>
-            <a:off x="24710510" y="9346740"/>
+            <a:off x="24710510" y="9113378"/>
             <a:ext cx="1302408" cy="861774"/>
           </a:xfrm>
           <a:prstGeom prst="rect">
@@ -21482,7 +21338,7 @@
         </p:nvSpPr>
         <p:spPr>
           <a:xfrm>
-            <a:off x="32495344" y="9349852"/>
+            <a:off x="32495344" y="9116490"/>
             <a:ext cx="1302408" cy="861774"/>
           </a:xfrm>
           <a:prstGeom prst="rect">
@@ -22150,23 +22006,6 @@
 </file>
 
 <file path=customXml/item1.xml><?xml version="1.0" encoding="utf-8"?>
-<p:properties xmlns:p="http://schemas.microsoft.com/office/2006/metadata/properties" xmlns:xsi="http://www.w3.org/2001/XMLSchema-instance" xmlns:pc="http://schemas.microsoft.com/office/infopath/2007/PartnerControls">
-  <documentManagement>
-    <_activity xmlns="4668150b-da18-493d-a040-cbc02bf476e5" xsi:nil="true"/>
-  </documentManagement>
-</p:properties>
-</file>
-
-<file path=customXml/item2.xml><?xml version="1.0" encoding="utf-8"?>
-<?mso-contentType ?>
-<FormTemplates xmlns="http://schemas.microsoft.com/sharepoint/v3/contenttype/forms">
-  <Display>DocumentLibraryForm</Display>
-  <Edit>DocumentLibraryForm</Edit>
-  <New>DocumentLibraryForm</New>
-</FormTemplates>
-</file>
-
-<file path=customXml/item3.xml><?xml version="1.0" encoding="utf-8"?>
 <ct:contentTypeSchema xmlns:ct="http://schemas.microsoft.com/office/2006/metadata/contentType" xmlns:ma="http://schemas.microsoft.com/office/2006/metadata/properties/metaAttributes" ct:_="" ma:_="" ma:contentTypeName="Document" ma:contentTypeID="0x0101003D700C8CE122D6468A01E7E6F602FC93" ma:contentTypeVersion="15" ma:contentTypeDescription="Create a new document." ma:contentTypeScope="" ma:versionID="78a361b573735f4e8f7ea36d196d1741">
   <xsd:schema xmlns:xsd="http://www.w3.org/2001/XMLSchema" xmlns:xs="http://www.w3.org/2001/XMLSchema" xmlns:p="http://schemas.microsoft.com/office/2006/metadata/properties" xmlns:ns3="4668150b-da18-493d-a040-cbc02bf476e5" xmlns:ns4="e584c313-2618-4b13-ba4c-e296ab8c40d5" targetNamespace="http://schemas.microsoft.com/office/2006/metadata/properties" ma:root="true" ma:fieldsID="aacb3e30d10ecf7b0bc1959e7f1d2dde" ns3:_="" ns4:_="">
     <xsd:import namespace="4668150b-da18-493d-a040-cbc02bf476e5"/>
@@ -22397,32 +22236,24 @@
 </ct:contentTypeSchema>
 </file>
 
-<file path=customXml/itemProps1.xml><?xml version="1.0" encoding="utf-8"?>
-<ds:datastoreItem xmlns:ds="http://schemas.openxmlformats.org/officeDocument/2006/customXml" ds:itemID="{50738C8C-DF76-4388-8A52-04F66B29D512}">
-  <ds:schemaRefs>
-    <ds:schemaRef ds:uri="http://purl.org/dc/elements/1.1/"/>
-    <ds:schemaRef ds:uri="http://www.w3.org/XML/1998/namespace"/>
-    <ds:schemaRef ds:uri="http://schemas.microsoft.com/office/2006/documentManagement/types"/>
-    <ds:schemaRef ds:uri="e584c313-2618-4b13-ba4c-e296ab8c40d5"/>
-    <ds:schemaRef ds:uri="4668150b-da18-493d-a040-cbc02bf476e5"/>
-    <ds:schemaRef ds:uri="http://purl.org/dc/dcmitype/"/>
-    <ds:schemaRef ds:uri="http://schemas.microsoft.com/office/2006/metadata/properties"/>
-    <ds:schemaRef ds:uri="http://schemas.microsoft.com/office/infopath/2007/PartnerControls"/>
-    <ds:schemaRef ds:uri="http://schemas.openxmlformats.org/package/2006/metadata/core-properties"/>
-    <ds:schemaRef ds:uri="http://purl.org/dc/terms/"/>
-  </ds:schemaRefs>
-</ds:datastoreItem>
+<file path=customXml/item2.xml><?xml version="1.0" encoding="utf-8"?>
+<?mso-contentType ?>
+<FormTemplates xmlns="http://schemas.microsoft.com/sharepoint/v3/contenttype/forms">
+  <Display>DocumentLibraryForm</Display>
+  <Edit>DocumentLibraryForm</Edit>
+  <New>DocumentLibraryForm</New>
+</FormTemplates>
 </file>
 
-<file path=customXml/itemProps2.xml><?xml version="1.0" encoding="utf-8"?>
-<ds:datastoreItem xmlns:ds="http://schemas.openxmlformats.org/officeDocument/2006/customXml" ds:itemID="{F2F1528F-C631-4170-A5E1-A10CC58FFF8F}">
-  <ds:schemaRefs>
-    <ds:schemaRef ds:uri="http://schemas.microsoft.com/sharepoint/v3/contenttype/forms"/>
-  </ds:schemaRefs>
-</ds:datastoreItem>
+<file path=customXml/item3.xml><?xml version="1.0" encoding="utf-8"?>
+<p:properties xmlns:p="http://schemas.microsoft.com/office/2006/metadata/properties" xmlns:xsi="http://www.w3.org/2001/XMLSchema-instance" xmlns:pc="http://schemas.microsoft.com/office/infopath/2007/PartnerControls">
+  <documentManagement>
+    <_activity xmlns="4668150b-da18-493d-a040-cbc02bf476e5" xsi:nil="true"/>
+  </documentManagement>
+</p:properties>
 </file>
 
-<file path=customXml/itemProps3.xml><?xml version="1.0" encoding="utf-8"?>
+<file path=customXml/itemProps1.xml><?xml version="1.0" encoding="utf-8"?>
 <ds:datastoreItem xmlns:ds="http://schemas.openxmlformats.org/officeDocument/2006/customXml" ds:itemID="{9028DA92-C8DA-4342-B357-E9B52241A81B}">
   <ds:schemaRefs>
     <ds:schemaRef ds:uri="http://schemas.microsoft.com/office/2006/metadata/contentType"/>
@@ -22439,4 +22270,29 @@
     <ds:schemaRef ds:uri="http://schemas.microsoft.com/internal/obd"/>
   </ds:schemaRefs>
 </ds:datastoreItem>
+</file>
+
+<file path=customXml/itemProps2.xml><?xml version="1.0" encoding="utf-8"?>
+<ds:datastoreItem xmlns:ds="http://schemas.openxmlformats.org/officeDocument/2006/customXml" ds:itemID="{F2F1528F-C631-4170-A5E1-A10CC58FFF8F}">
+  <ds:schemaRefs>
+    <ds:schemaRef ds:uri="http://schemas.microsoft.com/sharepoint/v3/contenttype/forms"/>
+  </ds:schemaRefs>
+</ds:datastoreItem>
+</file>
+
+<file path=customXml/itemProps3.xml><?xml version="1.0" encoding="utf-8"?>
+<ds:datastoreItem xmlns:ds="http://schemas.openxmlformats.org/officeDocument/2006/customXml" ds:itemID="{50738C8C-DF76-4388-8A52-04F66B29D512}">
+  <ds:schemaRefs>
+    <ds:schemaRef ds:uri="http://purl.org/dc/elements/1.1/"/>
+    <ds:schemaRef ds:uri="http://www.w3.org/XML/1998/namespace"/>
+    <ds:schemaRef ds:uri="http://schemas.microsoft.com/office/2006/documentManagement/types"/>
+    <ds:schemaRef ds:uri="e584c313-2618-4b13-ba4c-e296ab8c40d5"/>
+    <ds:schemaRef ds:uri="4668150b-da18-493d-a040-cbc02bf476e5"/>
+    <ds:schemaRef ds:uri="http://purl.org/dc/dcmitype/"/>
+    <ds:schemaRef ds:uri="http://schemas.microsoft.com/office/2006/metadata/properties"/>
+    <ds:schemaRef ds:uri="http://schemas.microsoft.com/office/infopath/2007/PartnerControls"/>
+    <ds:schemaRef ds:uri="http://schemas.openxmlformats.org/package/2006/metadata/core-properties"/>
+    <ds:schemaRef ds:uri="http://purl.org/dc/terms/"/>
+  </ds:schemaRefs>
+</ds:datastoreItem>
 </file>